--- a/docs/showcase/parks-annual-report.pptx
+++ b/docs/showcase/parks-annual-report.pptx
@@ -122,9 +122,9 @@
           <c:layoutTarget val="inner"/>
           <c:xMode val="edge"/>
           <c:yMode val="edge"/>
-          <c:x val="0.03"/>
+          <c:x val="0.07"/>
           <c:y val="0.04"/>
-          <c:w val="0.94"/>
+          <c:w val="0.9"/>
           <c:h val="0.86"/>
         </c:manualLayout>
       </c:layout>
@@ -179,9 +179,9 @@
                         <a:solidFill>
                           <a:srgbClr val="1F2723"/>
                         </a:solidFill>
-                        <a:latin typeface="Inter"/>
+                        <a:latin typeface="Arial"/>
                       </a:rPr>
-                      <a:t>Low: 330,000</a:t>
+                      <a:t>Low: 330 in January</a:t>
                     </a:r>
                   </a:p>
                 </c:rich>
@@ -195,7 +195,7 @@
                       <a:solidFill>
                         <a:srgbClr val="1F2723"/>
                       </a:solidFill>
-                      <a:latin typeface="Inter"/>
+                      <a:latin typeface="Arial"/>
                     </a:defRPr>
                   </a:pPr>
                 </a:p>
@@ -267,13 +267,13 @@
                 <c:formatCode>#,##0</c:formatCode>
                 <c:ptCount val="12"/>
                 <c:pt idx="0">
-                  <c:v>560</c:v>
+                  <c:v>610</c:v>
                 </c:pt>
                 <c:pt idx="1">
-                  <c:v>690</c:v>
+                  <c:v>750</c:v>
                 </c:pt>
                 <c:pt idx="2">
-                  <c:v>840</c:v>
+                  <c:v>910</c:v>
                 </c:pt>
                 <c:pt idx="3">
                   <c:v>1060</c:v>
@@ -282,13 +282,13 @@
                   <c:v>1180</c:v>
                 </c:pt>
                 <c:pt idx="5">
-                  <c:v>920</c:v>
+                  <c:v>980</c:v>
                 </c:pt>
                 <c:pt idx="6">
-                  <c:v>760</c:v>
+                  <c:v>810</c:v>
                 </c:pt>
                 <c:pt idx="7">
-                  <c:v>470</c:v>
+                  <c:v>510</c:v>
                 </c:pt>
                 <c:pt idx="8">
                   <c:v>380</c:v>
@@ -300,7 +300,7 @@
                   <c:v>400</c:v>
                 </c:pt>
                 <c:pt idx="11">
-                  <c:v>830</c:v>
+                  <c:v>500</c:v>
                 </c:pt>
               </c:numCache>
             </c:numRef>
@@ -382,13 +382,13 @@
                 <c:formatCode>#,##0</c:formatCode>
                 <c:ptCount val="12"/>
                 <c:pt idx="0">
-                  <c:v>520</c:v>
+                  <c:v>570</c:v>
                 </c:pt>
                 <c:pt idx="1">
-                  <c:v>640</c:v>
+                  <c:v>700</c:v>
                 </c:pt>
                 <c:pt idx="2">
-                  <c:v>780</c:v>
+                  <c:v>850</c:v>
                 </c:pt>
                 <c:pt idx="3">
                   <c:v>1010</c:v>
@@ -397,13 +397,13 @@
                   <c:v>1120</c:v>
                 </c:pt>
                 <c:pt idx="5">
-                  <c:v>860</c:v>
+                  <c:v>920</c:v>
                 </c:pt>
                 <c:pt idx="6">
-                  <c:v>700</c:v>
+                  <c:v>750</c:v>
                 </c:pt>
                 <c:pt idx="7">
-                  <c:v>430</c:v>
+                  <c:v>470</c:v>
                 </c:pt>
                 <c:pt idx="8">
                   <c:v>360</c:v>
@@ -415,7 +415,7 @@
                   <c:v>380</c:v>
                 </c:pt>
                 <c:pt idx="11">
-                  <c:v>830</c:v>
+                  <c:v>500</c:v>
                 </c:pt>
               </c:numCache>
             </c:numRef>
@@ -451,7 +451,7 @@
                 <a:solidFill>
                   <a:srgbClr val="58615B"/>
                 </a:solidFill>
-                <a:latin typeface="Inter"/>
+                <a:latin typeface="Arial"/>
               </a:defRPr>
             </a:pPr>
           </a:p>
@@ -469,14 +469,44 @@
           <c:max val="1400.0"/>
           <c:min val="0.0"/>
         </c:scaling>
-        <c:delete/>
+        <c:delete val="0"/>
         <c:axPos val="l"/>
-        <c:majorTickMark val="out"/>
+        <c:majorGridlines>
+          <c:spPr>
+            <a:ln w="6350">
+              <a:solidFill>
+                <a:srgbClr val="CFCBBF"/>
+              </a:solidFill>
+            </a:ln>
+          </c:spPr>
+        </c:majorGridlines>
+        <c:numFmt formatCode="#,##0" sourceLinked="0"/>
+        <c:majorTickMark val="none"/>
         <c:minorTickMark val="none"/>
         <c:tickLblPos val="nextTo"/>
+        <c:spPr>
+          <a:ln>
+            <a:noFill/>
+          </a:ln>
+        </c:spPr>
+        <c:txPr>
+          <a:bodyPr/>
+          <a:lstStyle/>
+          <a:p>
+            <a:pPr>
+              <a:defRPr sz="1000" b="0" i="0">
+                <a:solidFill>
+                  <a:srgbClr val="58615B"/>
+                </a:solidFill>
+                <a:latin typeface="Arial"/>
+              </a:defRPr>
+            </a:pPr>
+          </a:p>
+        </c:txPr>
         <c:crossAx val="2118791784"/>
         <c:crosses val="autoZero"/>
         <c:crossBetween val="between"/>
+        <c:majorUnit val="200.0"/>
       </c:valAx>
       <c:spPr>
         <a:noFill/>
@@ -495,7 +525,7 @@
           <a:solidFill>
             <a:srgbClr val="58615B"/>
           </a:solidFill>
-          <a:latin typeface="Inter"/>
+          <a:latin typeface="Arial"/>
         </a:defRPr>
       </a:pPr>
       <a:endParaRPr lang="en-US"/>
@@ -585,7 +615,7 @@
                     <a:solidFill>
                       <a:srgbClr val="1F2723"/>
                     </a:solidFill>
-                    <a:latin typeface="Inter"/>
+                    <a:latin typeface="Arial"/>
                   </a:defRPr>
                 </a:pPr>
               </a:p>
@@ -701,7 +731,7 @@
                 <a:solidFill>
                   <a:srgbClr val="1F2723"/>
                 </a:solidFill>
-                <a:latin typeface="Inter"/>
+                <a:latin typeface="Arial"/>
               </a:defRPr>
             </a:pPr>
           </a:p>
@@ -743,7 +773,7 @@
           <a:solidFill>
             <a:srgbClr val="58615B"/>
           </a:solidFill>
-          <a:latin typeface="Inter"/>
+          <a:latin typeface="Arial"/>
         </a:defRPr>
       </a:pPr>
       <a:endParaRPr lang="en-US"/>
@@ -820,7 +850,7 @@
                       <a:solidFill>
                         <a:srgbClr val="B4561A"/>
                       </a:solidFill>
-                      <a:latin typeface="Inter"/>
+                      <a:latin typeface="Arial"/>
                     </a:defRPr>
                   </a:pPr>
                 </a:p>
@@ -843,7 +873,7 @@
                     <a:solidFill>
                       <a:srgbClr val="1F2723"/>
                     </a:solidFill>
-                    <a:latin typeface="Inter"/>
+                    <a:latin typeface="Arial"/>
                   </a:defRPr>
                 </a:pPr>
               </a:p>
@@ -941,7 +971,7 @@
                 <a:solidFill>
                   <a:srgbClr val="1F2723"/>
                 </a:solidFill>
-                <a:latin typeface="Inter"/>
+                <a:latin typeface="Arial"/>
               </a:defRPr>
             </a:pPr>
           </a:p>
@@ -983,7 +1013,7 @@
           <a:solidFill>
             <a:srgbClr val="58615B"/>
           </a:solidFill>
-          <a:latin typeface="Inter"/>
+          <a:latin typeface="Arial"/>
         </a:defRPr>
       </a:pPr>
       <a:endParaRPr lang="en-US"/>
@@ -1059,7 +1089,7 @@
                         <a:solidFill>
                           <a:srgbClr val="1F2723"/>
                         </a:solidFill>
-                        <a:latin typeface="Inter"/>
+                        <a:latin typeface="Arial"/>
                       </a:rPr>
                       <a:t>118,000</a:t>
                     </a:r>
@@ -1075,7 +1105,7 @@
                       <a:solidFill>
                         <a:srgbClr val="1F2723"/>
                       </a:solidFill>
-                      <a:latin typeface="Inter"/>
+                      <a:latin typeface="Arial"/>
                     </a:defRPr>
                   </a:pPr>
                 </a:p>
@@ -1100,7 +1130,7 @@
                         <a:solidFill>
                           <a:srgbClr val="1F2723"/>
                         </a:solidFill>
-                        <a:latin typeface="Inter"/>
+                        <a:latin typeface="Arial"/>
                       </a:rPr>
                       <a:t>139,000</a:t>
                     </a:r>
@@ -1116,7 +1146,7 @@
                       <a:solidFill>
                         <a:srgbClr val="1F2723"/>
                       </a:solidFill>
-                      <a:latin typeface="Inter"/>
+                      <a:latin typeface="Arial"/>
                     </a:defRPr>
                   </a:pPr>
                 </a:p>
@@ -1141,7 +1171,7 @@
                         <a:solidFill>
                           <a:srgbClr val="1F2723"/>
                         </a:solidFill>
-                        <a:latin typeface="Inter"/>
+                        <a:latin typeface="Arial"/>
                       </a:rPr>
                       <a:t>158,000</a:t>
                     </a:r>
@@ -1157,7 +1187,7 @@
                       <a:solidFill>
                         <a:srgbClr val="1F2723"/>
                       </a:solidFill>
-                      <a:latin typeface="Inter"/>
+                      <a:latin typeface="Arial"/>
                     </a:defRPr>
                   </a:pPr>
                 </a:p>
@@ -1182,7 +1212,7 @@
                         <a:solidFill>
                           <a:srgbClr val="1F2723"/>
                         </a:solidFill>
-                        <a:latin typeface="Inter"/>
+                        <a:latin typeface="Arial"/>
                       </a:rPr>
                       <a:t>171,000</a:t>
                     </a:r>
@@ -1198,7 +1228,7 @@
                       <a:solidFill>
                         <a:srgbClr val="1F2723"/>
                       </a:solidFill>
-                      <a:latin typeface="Inter"/>
+                      <a:latin typeface="Arial"/>
                     </a:defRPr>
                   </a:pPr>
                 </a:p>
@@ -1223,7 +1253,7 @@
                         <a:solidFill>
                           <a:srgbClr val="B4561A"/>
                         </a:solidFill>
-                        <a:latin typeface="Inter"/>
+                        <a:latin typeface="Arial"/>
                       </a:rPr>
                       <a:t>192,000</a:t>
                     </a:r>
@@ -1239,7 +1269,7 @@
                       <a:solidFill>
                         <a:srgbClr val="B4561A"/>
                       </a:solidFill>
-                      <a:latin typeface="Inter"/>
+                      <a:latin typeface="Arial"/>
                     </a:defRPr>
                   </a:pPr>
                 </a:p>
@@ -1262,7 +1292,7 @@
                     <a:solidFill>
                       <a:srgbClr val="1F2723"/>
                     </a:solidFill>
-                    <a:latin typeface="Inter"/>
+                    <a:latin typeface="Arial"/>
                   </a:defRPr>
                 </a:pPr>
               </a:p>
@@ -1352,7 +1382,7 @@
                 <a:solidFill>
                   <a:srgbClr val="58615B"/>
                 </a:solidFill>
-                <a:latin typeface="Inter"/>
+                <a:latin typeface="Arial"/>
               </a:defRPr>
             </a:pPr>
           </a:p>
@@ -1394,7 +1424,7 @@
           <a:solidFill>
             <a:srgbClr val="58615B"/>
           </a:solidFill>
-          <a:latin typeface="Inter"/>
+          <a:latin typeface="Arial"/>
         </a:defRPr>
       </a:pPr>
       <a:endParaRPr lang="en-US"/>
@@ -5143,7 +5173,7 @@
                 <a:solidFill>
                   <a:srgbClr val="58615B"/>
                 </a:solidFill>
-                <a:latin typeface="Inter"/>
+                <a:latin typeface="Arial"/>
               </a:rPr>
               <a:t>Brannoch National Parks Service  |  Annual Report 2025-26</a:t>
             </a:r>
@@ -5178,7 +5208,7 @@
                 <a:solidFill>
                   <a:srgbClr val="58615B"/>
                 </a:solidFill>
-                <a:latin typeface="Inter"/>
+                <a:latin typeface="Arial"/>
               </a:rPr>
               <a:t>1</a:t>
             </a:fld>
@@ -5253,7 +5283,7 @@
                 <a:solidFill>
                   <a:srgbClr val="FFFFFF"/>
                 </a:solidFill>
-                <a:latin typeface="Gelasio"/>
+                <a:latin typeface="Georgia"/>
               </a:rPr>
               <a:t>1</a:t>
             </a:r>
@@ -5299,7 +5329,7 @@
                 <a:solidFill>
                   <a:srgbClr val="1F5A6E"/>
                 </a:solidFill>
-                <a:latin typeface="Inter"/>
+                <a:latin typeface="Arial"/>
               </a:rPr>
               <a:t>VISITORS AND ACCESS</a:t>
             </a:r>
@@ -5345,7 +5375,7 @@
                 <a:solidFill>
                   <a:srgbClr val="1F2723"/>
                 </a:solidFill>
-                <a:latin typeface="Gelasio"/>
+                <a:latin typeface="Georgia"/>
               </a:rPr>
               <a:t>Visits rose 6.0% to 8.42 million, and more than a third of visitors</a:t>
             </a:r>
@@ -5355,7 +5385,7 @@
                 <a:solidFill>
                   <a:srgbClr val="1F2723"/>
                 </a:solidFill>
-                <a:latin typeface="Gelasio"/>
+                <a:latin typeface="Georgia"/>
               </a:rPr>
               <a:t>now arrive without a car</a:t>
             </a:r>
@@ -5401,7 +5431,7 @@
                 <a:solidFill>
                   <a:srgbClr val="58615B"/>
                 </a:solidFill>
-                <a:latin typeface="Inter"/>
+                <a:latin typeface="Arial"/>
               </a:rPr>
               <a:t>Visits each month, thousands: </a:t>
             </a:r>
@@ -5410,7 +5440,7 @@
                 <a:solidFill>
                   <a:srgbClr val="1F5A6E"/>
                 </a:solidFill>
-                <a:latin typeface="Inter"/>
+                <a:latin typeface="Arial"/>
               </a:rPr>
               <a:t>this year, 2025-26</a:t>
             </a:r>
@@ -5419,7 +5449,7 @@
                 <a:solidFill>
                   <a:srgbClr val="58615B"/>
                 </a:solidFill>
-                <a:latin typeface="Inter"/>
+                <a:latin typeface="Arial"/>
               </a:rPr>
               <a:t>, and </a:t>
             </a:r>
@@ -5428,7 +5458,7 @@
                 <a:solidFill>
                   <a:srgbClr val="58615B"/>
                 </a:solidFill>
-                <a:latin typeface="Inter"/>
+                <a:latin typeface="Arial"/>
               </a:rPr>
               <a:t>last year, 2024-25</a:t>
             </a:r>
@@ -5521,7 +5551,7 @@
                 <a:solidFill>
                   <a:srgbClr val="1F2723"/>
                 </a:solidFill>
-                <a:latin typeface="Gelasio"/>
+                <a:latin typeface="Georgia"/>
               </a:rPr>
               <a:t>How visitors arrived</a:t>
             </a:r>
@@ -5538,7 +5568,7 @@
         </p:nvGraphicFramePr>
         <p:xfrm>
           <a:off x="8126599" y="2145030"/>
-          <a:ext cx="3333881" cy="1836928"/>
+          <a:ext cx="3333881" cy="1684274"/>
         </p:xfrm>
         <a:graphic>
           <a:graphicData uri="http://schemas.openxmlformats.org/drawingml/2006/table">
@@ -5550,7 +5580,7 @@
                 <a:gridCol w="733454"/>
                 <a:gridCol w="733453"/>
               </a:tblGrid>
-              <a:tr h="488188">
+              <a:tr h="335534">
                 <a:tc>
                   <a:txBody>
                     <a:bodyPr wrap="square"/>
@@ -5562,7 +5592,7 @@
                           <a:solidFill>
                             <a:srgbClr val="1F2723"/>
                           </a:solidFill>
-                          <a:latin typeface="Inter"/>
+                          <a:latin typeface="Arial"/>
                         </a:rPr>
                         <a:t>Share of visits</a:t>
                       </a:r>
@@ -5570,7 +5600,7 @@
                         <a:solidFill>
                           <a:srgbClr val="1F2723"/>
                         </a:solidFill>
-                        <a:latin typeface="Inter"/>
+                        <a:latin typeface="Arial"/>
                       </a:endParaRPr>
                     </a:p>
                   </a:txBody>
@@ -5603,7 +5633,7 @@
                           <a:solidFill>
                             <a:srgbClr val="1F2723"/>
                           </a:solidFill>
-                          <a:latin typeface="Inter"/>
+                          <a:latin typeface="Arial"/>
                         </a:rPr>
                         <a:t>2024-25</a:t>
                       </a:r>
@@ -5611,7 +5641,7 @@
                         <a:solidFill>
                           <a:srgbClr val="1F2723"/>
                         </a:solidFill>
-                        <a:latin typeface="Inter"/>
+                        <a:latin typeface="Arial"/>
                       </a:endParaRPr>
                     </a:p>
                   </a:txBody>
@@ -5644,7 +5674,7 @@
                           <a:solidFill>
                             <a:srgbClr val="1F2723"/>
                           </a:solidFill>
-                          <a:latin typeface="Inter"/>
+                          <a:latin typeface="Arial"/>
                         </a:rPr>
                         <a:t>2025-26</a:t>
                       </a:r>
@@ -5652,7 +5682,7 @@
                         <a:solidFill>
                           <a:srgbClr val="1F2723"/>
                         </a:solidFill>
-                        <a:latin typeface="Inter"/>
+                        <a:latin typeface="Arial"/>
                       </a:endParaRPr>
                     </a:p>
                   </a:txBody>
@@ -5685,7 +5715,7 @@
                           <a:solidFill>
                             <a:srgbClr val="1F2723"/>
                           </a:solidFill>
-                          <a:latin typeface="Inter"/>
+                          <a:latin typeface="Arial"/>
                         </a:rPr>
                         <a:t>Change</a:t>
                       </a:r>
@@ -5693,7 +5723,7 @@
                         <a:solidFill>
                           <a:srgbClr val="1F2723"/>
                         </a:solidFill>
-                        <a:latin typeface="Inter"/>
+                        <a:latin typeface="Arial"/>
                       </a:endParaRPr>
                     </a:p>
                   </a:txBody>
@@ -5728,7 +5758,7 @@
                           <a:solidFill>
                             <a:srgbClr val="1F2723"/>
                           </a:solidFill>
-                          <a:latin typeface="Inter"/>
+                          <a:latin typeface="Arial"/>
                         </a:rPr>
                         <a:t>Car</a:t>
                       </a:r>
@@ -5736,7 +5766,7 @@
                         <a:solidFill>
                           <a:srgbClr val="1F2723"/>
                         </a:solidFill>
-                        <a:latin typeface="Inter"/>
+                        <a:latin typeface="Arial"/>
                       </a:endParaRPr>
                     </a:p>
                   </a:txBody>
@@ -5771,7 +5801,7 @@
                           <a:solidFill>
                             <a:srgbClr val="1F2723"/>
                           </a:solidFill>
-                          <a:latin typeface="Inter"/>
+                          <a:latin typeface="Arial"/>
                         </a:rPr>
                         <a:t>71%</a:t>
                       </a:r>
@@ -5779,7 +5809,7 @@
                         <a:solidFill>
                           <a:srgbClr val="1F2723"/>
                         </a:solidFill>
-                        <a:latin typeface="Inter"/>
+                        <a:latin typeface="Arial"/>
                       </a:endParaRPr>
                     </a:p>
                   </a:txBody>
@@ -5814,7 +5844,7 @@
                           <a:solidFill>
                             <a:srgbClr val="1F2723"/>
                           </a:solidFill>
-                          <a:latin typeface="Inter"/>
+                          <a:latin typeface="Arial"/>
                         </a:rPr>
                         <a:t>64%</a:t>
                       </a:r>
@@ -5822,7 +5852,7 @@
                         <a:solidFill>
                           <a:srgbClr val="1F2723"/>
                         </a:solidFill>
-                        <a:latin typeface="Inter"/>
+                        <a:latin typeface="Arial"/>
                       </a:endParaRPr>
                     </a:p>
                   </a:txBody>
@@ -5857,7 +5887,7 @@
                           <a:solidFill>
                             <a:srgbClr val="1F2723"/>
                           </a:solidFill>
-                          <a:latin typeface="Inter"/>
+                          <a:latin typeface="Arial"/>
                         </a:rPr>
                         <a:t>-7 pts</a:t>
                       </a:r>
@@ -5865,7 +5895,7 @@
                         <a:solidFill>
                           <a:srgbClr val="1F2723"/>
                         </a:solidFill>
-                        <a:latin typeface="Inter"/>
+                        <a:latin typeface="Arial"/>
                       </a:endParaRPr>
                     </a:p>
                   </a:txBody>
@@ -5902,7 +5932,7 @@
                           <a:solidFill>
                             <a:srgbClr val="1F2723"/>
                           </a:solidFill>
-                          <a:latin typeface="Inter"/>
+                          <a:latin typeface="Arial"/>
                         </a:rPr>
                         <a:t>Bus, shuttle or train</a:t>
                       </a:r>
@@ -5910,7 +5940,7 @@
                         <a:solidFill>
                           <a:srgbClr val="1F2723"/>
                         </a:solidFill>
-                        <a:latin typeface="Inter"/>
+                        <a:latin typeface="Arial"/>
                       </a:endParaRPr>
                     </a:p>
                   </a:txBody>
@@ -5945,7 +5975,7 @@
                           <a:solidFill>
                             <a:srgbClr val="1F2723"/>
                           </a:solidFill>
-                          <a:latin typeface="Inter"/>
+                          <a:latin typeface="Arial"/>
                         </a:rPr>
                         <a:t>19%</a:t>
                       </a:r>
@@ -5953,7 +5983,7 @@
                         <a:solidFill>
                           <a:srgbClr val="1F2723"/>
                         </a:solidFill>
-                        <a:latin typeface="Inter"/>
+                        <a:latin typeface="Arial"/>
                       </a:endParaRPr>
                     </a:p>
                   </a:txBody>
@@ -5988,7 +6018,7 @@
                           <a:solidFill>
                             <a:srgbClr val="1F2723"/>
                           </a:solidFill>
-                          <a:latin typeface="Inter"/>
+                          <a:latin typeface="Arial"/>
                         </a:rPr>
                         <a:t>25%</a:t>
                       </a:r>
@@ -5996,7 +6026,7 @@
                         <a:solidFill>
                           <a:srgbClr val="1F2723"/>
                         </a:solidFill>
-                        <a:latin typeface="Inter"/>
+                        <a:latin typeface="Arial"/>
                       </a:endParaRPr>
                     </a:p>
                   </a:txBody>
@@ -6031,7 +6061,7 @@
                           <a:solidFill>
                             <a:srgbClr val="B4561A"/>
                           </a:solidFill>
-                          <a:latin typeface="Inter"/>
+                          <a:latin typeface="Arial"/>
                         </a:rPr>
                         <a:t>+6 pts</a:t>
                       </a:r>
@@ -6039,7 +6069,7 @@
                         <a:solidFill>
                           <a:srgbClr val="B4561A"/>
                         </a:solidFill>
-                        <a:latin typeface="Inter"/>
+                        <a:latin typeface="Arial"/>
                       </a:endParaRPr>
                     </a:p>
                   </a:txBody>
@@ -6076,7 +6106,7 @@
                           <a:solidFill>
                             <a:srgbClr val="1F2723"/>
                           </a:solidFill>
-                          <a:latin typeface="Inter"/>
+                          <a:latin typeface="Arial"/>
                         </a:rPr>
                         <a:t>On foot or by bike</a:t>
                       </a:r>
@@ -6084,7 +6114,7 @@
                         <a:solidFill>
                           <a:srgbClr val="1F2723"/>
                         </a:solidFill>
-                        <a:latin typeface="Inter"/>
+                        <a:latin typeface="Arial"/>
                       </a:endParaRPr>
                     </a:p>
                   </a:txBody>
@@ -6119,7 +6149,7 @@
                           <a:solidFill>
                             <a:srgbClr val="1F2723"/>
                           </a:solidFill>
-                          <a:latin typeface="Inter"/>
+                          <a:latin typeface="Arial"/>
                         </a:rPr>
                         <a:t>10%</a:t>
                       </a:r>
@@ -6127,7 +6157,7 @@
                         <a:solidFill>
                           <a:srgbClr val="1F2723"/>
                         </a:solidFill>
-                        <a:latin typeface="Inter"/>
+                        <a:latin typeface="Arial"/>
                       </a:endParaRPr>
                     </a:p>
                   </a:txBody>
@@ -6162,7 +6192,7 @@
                           <a:solidFill>
                             <a:srgbClr val="1F2723"/>
                           </a:solidFill>
-                          <a:latin typeface="Inter"/>
+                          <a:latin typeface="Arial"/>
                         </a:rPr>
                         <a:t>11%</a:t>
                       </a:r>
@@ -6170,7 +6200,7 @@
                         <a:solidFill>
                           <a:srgbClr val="1F2723"/>
                         </a:solidFill>
-                        <a:latin typeface="Inter"/>
+                        <a:latin typeface="Arial"/>
                       </a:endParaRPr>
                     </a:p>
                   </a:txBody>
@@ -6205,7 +6235,7 @@
                           <a:solidFill>
                             <a:srgbClr val="1F2723"/>
                           </a:solidFill>
-                          <a:latin typeface="Inter"/>
+                          <a:latin typeface="Arial"/>
                         </a:rPr>
                         <a:t>+1 pt</a:t>
                       </a:r>
@@ -6213,7 +6243,7 @@
                         <a:solidFill>
                           <a:srgbClr val="1F2723"/>
                         </a:solidFill>
-                        <a:latin typeface="Inter"/>
+                        <a:latin typeface="Arial"/>
                       </a:endParaRPr>
                     </a:p>
                   </a:txBody>
@@ -6250,7 +6280,7 @@
         </p:nvSpPr>
         <p:spPr>
           <a:xfrm>
-            <a:off x="8126599" y="4073398"/>
+            <a:off x="8126599" y="3920744"/>
             <a:ext cx="3333881" cy="1483360"/>
           </a:xfrm>
           <a:prstGeom prst="rect">
@@ -6281,7 +6311,7 @@
                 <a:solidFill>
                   <a:srgbClr val="1F2723"/>
                 </a:solidFill>
-                <a:latin typeface="Inter"/>
+                <a:latin typeface="Arial"/>
               </a:rPr>
               <a:t>Step-free trails</a:t>
             </a:r>
@@ -6304,9 +6334,9 @@
                 <a:solidFill>
                   <a:srgbClr val="1F2723"/>
                 </a:solidFill>
-                <a:latin typeface="Inter"/>
+                <a:latin typeface="Arial"/>
               </a:rPr>
-              <a:t>241 km of trail can now be used without steps</a:t>
+              <a:t>241 km of trail can now be used without steps by</a:t>
             </a:r>
             <a:br/>
             <a:r>
@@ -6314,9 +6344,9 @@
                 <a:solidFill>
                   <a:srgbClr val="1F2723"/>
                 </a:solidFill>
-                <a:latin typeface="Inter"/>
+                <a:latin typeface="Arial"/>
               </a:rPr>
-              <a:t>by wheelchairs and buggies, 53 km more</a:t>
+              <a:t>wheelchairs and buggies, 53 km more than last</a:t>
             </a:r>
             <a:br/>
             <a:r>
@@ -6324,9 +6354,9 @@
                 <a:solidFill>
                   <a:srgbClr val="1F2723"/>
                 </a:solidFill>
-                <a:latin typeface="Inter"/>
+                <a:latin typeface="Arial"/>
               </a:rPr>
-              <a:t>than last year.</a:t>
+              <a:t>year.</a:t>
             </a:r>
           </a:p>
           <a:p>
@@ -6347,7 +6377,7 @@
                 <a:solidFill>
                   <a:srgbClr val="1F2723"/>
                 </a:solidFill>
-                <a:latin typeface="Inter"/>
+                <a:latin typeface="Arial"/>
               </a:rPr>
               <a:t>School visits</a:t>
             </a:r>
@@ -6370,7 +6400,7 @@
                 <a:solidFill>
                   <a:srgbClr val="1F2723"/>
                 </a:solidFill>
-                <a:latin typeface="Inter"/>
+                <a:latin typeface="Arial"/>
               </a:rPr>
               <a:t>41,300 pupils came on free school trips.</a:t>
             </a:r>
@@ -6416,7 +6446,7 @@
                 <a:solidFill>
                   <a:srgbClr val="58615B"/>
                 </a:solidFill>
-                <a:latin typeface="Inter"/>
+                <a:latin typeface="Arial"/>
               </a:rPr>
               <a:t>Visits are counted at park entrances; how visitors arrived comes from our visitor survey. Source: Brannoch National Parks Service records, April 2025 to March 2026. Illustrative figures for a fictional service.</a:t>
             </a:r>
@@ -6431,7 +6461,7 @@
         </p:nvSpPr>
         <p:spPr>
           <a:xfrm>
-            <a:off x="3153535" y="2521839"/>
+            <a:off x="3329267" y="2521839"/>
             <a:ext cx="167640" cy="167640"/>
           </a:xfrm>
           <a:prstGeom prst="ellipse">
@@ -6460,8 +6490,8 @@
         </p:nvSpPr>
         <p:spPr>
           <a:xfrm>
-            <a:off x="3423727" y="2525649"/>
-            <a:ext cx="2171008" cy="160020"/>
+            <a:off x="3599460" y="2525649"/>
+            <a:ext cx="1413947" cy="160020"/>
           </a:xfrm>
           <a:prstGeom prst="rect">
             <a:avLst/>
@@ -6491,9 +6521,9 @@
                 <a:solidFill>
                   <a:srgbClr val="B4561A"/>
                 </a:solidFill>
-                <a:latin typeface="Inter"/>
+                <a:latin typeface="Arial"/>
               </a:rPr>
-              <a:t>Peak: 1.18 million visits in August</a:t>
+              <a:t>Peak: 1,180 in August</a:t>
             </a:r>
           </a:p>
         </p:txBody>
@@ -6575,7 +6605,7 @@
                 <a:solidFill>
                   <a:srgbClr val="58615B"/>
                 </a:solidFill>
-                <a:latin typeface="Inter"/>
+                <a:latin typeface="Arial"/>
               </a:rPr>
               <a:t>Brannoch National Parks Service  |  Annual Report 2025-26</a:t>
             </a:r>
@@ -6610,7 +6640,7 @@
                 <a:solidFill>
                   <a:srgbClr val="58615B"/>
                 </a:solidFill>
-                <a:latin typeface="Inter"/>
+                <a:latin typeface="Arial"/>
               </a:rPr>
               <a:t>1</a:t>
             </a:fld>
@@ -6625,8 +6655,8 @@
         </p:nvSpPr>
         <p:spPr>
           <a:xfrm>
-            <a:off x="548640" y="548640"/>
-            <a:ext cx="387370" cy="392430"/>
+            <a:off x="537667" y="537667"/>
+            <a:ext cx="388279" cy="381787"/>
           </a:xfrm>
           <a:prstGeom prst="ellipse">
             <a:avLst/>
@@ -6654,8 +6684,8 @@
         </p:nvSpPr>
         <p:spPr>
           <a:xfrm>
-            <a:off x="594360" y="640080"/>
-            <a:ext cx="295930" cy="209550"/>
+            <a:off x="582473" y="627278"/>
+            <a:ext cx="298667" cy="202565"/>
           </a:xfrm>
           <a:prstGeom prst="rect">
             <a:avLst/>
@@ -6670,7 +6700,7 @@
           <a:p>
             <a:pPr algn="ctr" marL="0" indent="0">
               <a:lnSpc>
-                <a:spcPts val="1650"/>
+                <a:spcPts val="1595"/>
               </a:lnSpc>
               <a:spcBef>
                 <a:spcPts val="0"/>
@@ -6681,11 +6711,11 @@
               <a:buNone/>
             </a:pPr>
             <a:r>
-              <a:rPr sz="1500" b="1" i="0">
+              <a:rPr sz="1450" b="1" i="0">
                 <a:solidFill>
                   <a:srgbClr val="FFFFFF"/>
                 </a:solidFill>
-                <a:latin typeface="Gelasio"/>
+                <a:latin typeface="Georgia"/>
               </a:rPr>
               <a:t>2</a:t>
             </a:r>
@@ -6700,8 +6730,8 @@
         </p:nvSpPr>
         <p:spPr>
           <a:xfrm>
-            <a:off x="1118890" y="548640"/>
-            <a:ext cx="10524470" cy="152400"/>
+            <a:off x="1105168" y="537667"/>
+            <a:ext cx="10549165" cy="152400"/>
           </a:xfrm>
           <a:prstGeom prst="rect">
             <a:avLst/>
@@ -6727,11 +6757,11 @@
               <a:buNone/>
             </a:pPr>
             <a:r>
-              <a:rPr sz="1000" b="1" i="0" spc="100">
+              <a:rPr sz="1000" b="1" i="0" spc="98">
                 <a:solidFill>
                   <a:srgbClr val="1F5A6E"/>
                 </a:solidFill>
-                <a:latin typeface="Inter"/>
+                <a:latin typeface="Arial"/>
               </a:rPr>
               <a:t>CONSERVATION OUTCOMES</a:t>
             </a:r>
@@ -6746,8 +6776,8 @@
         </p:nvSpPr>
         <p:spPr>
           <a:xfrm>
-            <a:off x="1118890" y="746760"/>
-            <a:ext cx="10524470" cy="640080"/>
+            <a:off x="1105168" y="734873"/>
+            <a:ext cx="10549165" cy="626872"/>
           </a:xfrm>
           <a:prstGeom prst="rect">
             <a:avLst/>
@@ -6762,7 +6792,7 @@
           <a:p>
             <a:pPr algn="l" marL="0" indent="0">
               <a:lnSpc>
-                <a:spcPts val="2520"/>
+                <a:spcPts val="2468"/>
               </a:lnSpc>
               <a:spcBef>
                 <a:spcPts val="0"/>
@@ -6773,21 +6803,21 @@
               <a:buNone/>
             </a:pPr>
             <a:r>
-              <a:rPr sz="2400" b="1" i="0">
+              <a:rPr sz="2350" b="1" i="0">
                 <a:solidFill>
                   <a:srgbClr val="1F2723"/>
                 </a:solidFill>
-                <a:latin typeface="Gelasio"/>
+                <a:latin typeface="Georgia"/>
               </a:rPr>
               <a:t>Six of nine priority species have grown since 2021; three that need</a:t>
             </a:r>
             <a:br/>
             <a:r>
-              <a:rPr sz="2400" b="1" i="0">
+              <a:rPr sz="2350" b="1" i="0">
                 <a:solidFill>
                   <a:srgbClr val="1F2723"/>
                 </a:solidFill>
-                <a:latin typeface="Gelasio"/>
+                <a:latin typeface="Georgia"/>
               </a:rPr>
               <a:t>rivers or old pinewood have fallen</a:t>
             </a:r>
@@ -6802,8 +6832,8 @@
         </p:nvSpPr>
         <p:spPr>
           <a:xfrm>
-            <a:off x="548640" y="1661160"/>
-            <a:ext cx="7029319" cy="152400"/>
+            <a:off x="537667" y="1630579"/>
+            <a:ext cx="7048490" cy="152400"/>
           </a:xfrm>
           <a:prstGeom prst="rect">
             <a:avLst/>
@@ -6833,7 +6863,7 @@
                 <a:solidFill>
                   <a:srgbClr val="58615B"/>
                 </a:solidFill>
-                <a:latin typeface="Inter"/>
+                <a:latin typeface="Arial"/>
               </a:rPr>
               <a:t>Change in each species' counted population since the 2021 count, %</a:t>
             </a:r>
@@ -6849,8 +6879,8 @@
           <p:nvPr/>
         </p:nvGraphicFramePr>
         <p:xfrm>
-          <a:off x="548640" y="1905000"/>
-          <a:ext cx="7029319" cy="4000500"/>
+          <a:off x="537667" y="1872590"/>
+          <a:ext cx="7048490" cy="4049369"/>
         </p:xfrm>
         <a:graphic>
           <a:graphicData uri="http://schemas.openxmlformats.org/drawingml/2006/chart">
@@ -6866,8 +6896,8 @@
         </p:nvSpPr>
         <p:spPr>
           <a:xfrm>
-            <a:off x="7943719" y="1661160"/>
-            <a:ext cx="3699641" cy="4244340"/>
+            <a:off x="7944602" y="1630579"/>
+            <a:ext cx="3709731" cy="4291380"/>
           </a:xfrm>
           <a:prstGeom prst="rect">
             <a:avLst/>
@@ -6895,8 +6925,8 @@
         </p:nvSpPr>
         <p:spPr>
           <a:xfrm>
-            <a:off x="8126599" y="1844040"/>
-            <a:ext cx="3333881" cy="209550"/>
+            <a:off x="8123824" y="1809801"/>
+            <a:ext cx="3351287" cy="202565"/>
           </a:xfrm>
           <a:prstGeom prst="rect">
             <a:avLst/>
@@ -6911,7 +6941,7 @@
           <a:p>
             <a:pPr algn="l" marL="0" indent="0">
               <a:lnSpc>
-                <a:spcPts val="1650"/>
+                <a:spcPts val="1595"/>
               </a:lnSpc>
               <a:spcBef>
                 <a:spcPts val="0"/>
@@ -6922,11 +6952,11 @@
               <a:buNone/>
             </a:pPr>
             <a:r>
-              <a:rPr sz="1500" b="1" i="0">
+              <a:rPr sz="1450" b="1" i="0">
                 <a:solidFill>
                   <a:srgbClr val="1F2723"/>
                 </a:solidFill>
-                <a:latin typeface="Gelasio"/>
+                <a:latin typeface="Georgia"/>
               </a:rPr>
               <a:t>Habitat restored this year</a:t>
             </a:r>
@@ -6941,8 +6971,8 @@
         </p:nvSpPr>
         <p:spPr>
           <a:xfrm>
-            <a:off x="8126599" y="2145030"/>
-            <a:ext cx="3333881" cy="1257300"/>
+            <a:off x="8123824" y="2167942"/>
+            <a:ext cx="3351287" cy="455676"/>
           </a:xfrm>
           <a:prstGeom prst="rect">
             <a:avLst/>
@@ -6963,7 +6993,7 @@
                 <a:spcPts val="0"/>
               </a:spcBef>
               <a:spcAft>
-                <a:spcPts val="600"/>
+                <a:spcPts val="588"/>
               </a:spcAft>
               <a:buNone/>
             </a:pPr>
@@ -6972,7 +7002,7 @@
                 <a:solidFill>
                   <a:srgbClr val="1F2723"/>
                 </a:solidFill>
-                <a:latin typeface="Inter"/>
+                <a:latin typeface="Arial"/>
               </a:rPr>
               <a:t>We restored </a:t>
             </a:r>
@@ -6981,7 +7011,7 @@
                 <a:solidFill>
                   <a:srgbClr val="1F2723"/>
                 </a:solidFill>
-                <a:latin typeface="Inter"/>
+                <a:latin typeface="Arial"/>
               </a:rPr>
               <a:t>2,140 hectares</a:t>
             </a:r>
@@ -6990,9 +7020,9 @@
                 <a:solidFill>
                   <a:srgbClr val="1F2723"/>
                 </a:solidFill>
-                <a:latin typeface="Inter"/>
+                <a:latin typeface="Arial"/>
               </a:rPr>
-              <a:t> against a target</a:t>
+              <a:t>, 107% of our 2,000</a:t>
             </a:r>
             <a:br/>
             <a:r>
@@ -7000,9 +7030,729 @@
                 <a:solidFill>
                   <a:srgbClr val="1F2723"/>
                 </a:solidFill>
-                <a:latin typeface="Inter"/>
+                <a:latin typeface="Arial"/>
               </a:rPr>
-              <a:t>of 2,000:</a:t>
+              <a:t>target.</a:t>
+            </a:r>
+          </a:p>
+        </p:txBody>
+      </p:sp>
+      <p:graphicFrame>
+        <p:nvGraphicFramePr>
+          <p:cNvPr id="11" name="habt"/>
+          <p:cNvGraphicFramePr>
+            <a:graphicFrameLocks noGrp="1"/>
+          </p:cNvGraphicFramePr>
+          <p:nvPr/>
+        </p:nvGraphicFramePr>
+        <p:xfrm>
+          <a:off x="8123824" y="2779193"/>
+          <a:ext cx="3351287" cy="1688844"/>
+        </p:xfrm>
+        <a:graphic>
+          <a:graphicData uri="http://schemas.openxmlformats.org/drawingml/2006/table">
+            <a:tbl>
+              <a:tblPr firstRow="0" bandRow="0" lastRow="0" firstCol="0" lastCol="0" bandCol="0"/>
+              <a:tblGrid>
+                <a:gridCol w="1876721"/>
+                <a:gridCol w="737283"/>
+                <a:gridCol w="737283"/>
+              </a:tblGrid>
+              <a:tr h="331876">
+                <a:tc>
+                  <a:txBody>
+                    <a:bodyPr wrap="square"/>
+                    <a:lstStyle/>
+                    <a:p>
+                      <a:pPr algn="l"/>
+                      <a:r>
+                        <a:rPr sz="1000" b="1" i="0">
+                          <a:solidFill>
+                            <a:srgbClr val="1F2723"/>
+                          </a:solidFill>
+                          <a:latin typeface="Arial"/>
+                        </a:rPr>
+                        <a:t>Habitat work</a:t>
+                      </a:r>
+                      <a:endParaRPr sz="1000" b="1" i="0">
+                        <a:solidFill>
+                          <a:srgbClr val="1F2723"/>
+                        </a:solidFill>
+                        <a:latin typeface="Arial"/>
+                      </a:endParaRPr>
+                    </a:p>
+                  </a:txBody>
+                  <a:tcPr marL="89611" marR="89611" marT="89611" marB="89611">
+                    <a:lnL w="0">
+                      <a:noFill/>
+                    </a:lnL>
+                    <a:lnR w="0">
+                      <a:noFill/>
+                    </a:lnR>
+                    <a:lnT w="0">
+                      <a:noFill/>
+                    </a:lnT>
+                    <a:lnB w="19050">
+                      <a:solidFill>
+                        <a:srgbClr val="1F5A6E"/>
+                      </a:solidFill>
+                    </a:lnB>
+                    <a:noFill/>
+                  </a:tcPr>
+                </a:tc>
+                <a:tc>
+                  <a:txBody>
+                    <a:bodyPr wrap="square"/>
+                    <a:lstStyle/>
+                    <a:p>
+                      <a:pPr algn="r"/>
+                      <a:r>
+                        <a:rPr sz="1000" b="1" i="0">
+                          <a:solidFill>
+                            <a:srgbClr val="1F2723"/>
+                          </a:solidFill>
+                          <a:latin typeface="Arial"/>
+                        </a:rPr>
+                        <a:t>Hectares</a:t>
+                      </a:r>
+                      <a:endParaRPr sz="1000" b="1" i="0">
+                        <a:solidFill>
+                          <a:srgbClr val="1F2723"/>
+                        </a:solidFill>
+                        <a:latin typeface="Arial"/>
+                      </a:endParaRPr>
+                    </a:p>
+                  </a:txBody>
+                  <a:tcPr marL="89611" marR="89611" marT="89611" marB="89611">
+                    <a:lnL w="0">
+                      <a:noFill/>
+                    </a:lnL>
+                    <a:lnR w="0">
+                      <a:noFill/>
+                    </a:lnR>
+                    <a:lnT w="0">
+                      <a:noFill/>
+                    </a:lnT>
+                    <a:lnB w="19050">
+                      <a:solidFill>
+                        <a:srgbClr val="1F5A6E"/>
+                      </a:solidFill>
+                    </a:lnB>
+                    <a:noFill/>
+                  </a:tcPr>
+                </a:tc>
+                <a:tc>
+                  <a:txBody>
+                    <a:bodyPr wrap="square"/>
+                    <a:lstStyle/>
+                    <a:p>
+                      <a:pPr algn="r"/>
+                      <a:r>
+                        <a:rPr sz="1000" b="1" i="0">
+                          <a:solidFill>
+                            <a:srgbClr val="1F2723"/>
+                          </a:solidFill>
+                          <a:latin typeface="Arial"/>
+                        </a:rPr>
+                        <a:t>Share</a:t>
+                      </a:r>
+                      <a:endParaRPr sz="1000" b="1" i="0">
+                        <a:solidFill>
+                          <a:srgbClr val="1F2723"/>
+                        </a:solidFill>
+                        <a:latin typeface="Arial"/>
+                      </a:endParaRPr>
+                    </a:p>
+                  </a:txBody>
+                  <a:tcPr marL="89611" marR="89611" marT="89611" marB="89611">
+                    <a:lnL w="0">
+                      <a:noFill/>
+                    </a:lnL>
+                    <a:lnR w="0">
+                      <a:noFill/>
+                    </a:lnR>
+                    <a:lnT w="0">
+                      <a:noFill/>
+                    </a:lnT>
+                    <a:lnB w="19050">
+                      <a:solidFill>
+                        <a:srgbClr val="1F5A6E"/>
+                      </a:solidFill>
+                    </a:lnB>
+                    <a:noFill/>
+                  </a:tcPr>
+                </a:tc>
+              </a:tr>
+              <a:tr h="339242">
+                <a:tc>
+                  <a:txBody>
+                    <a:bodyPr wrap="square"/>
+                    <a:lstStyle/>
+                    <a:p>
+                      <a:pPr algn="l"/>
+                      <a:r>
+                        <a:rPr sz="1050" b="0" i="0">
+                          <a:solidFill>
+                            <a:srgbClr val="1F2723"/>
+                          </a:solidFill>
+                          <a:latin typeface="Arial"/>
+                        </a:rPr>
+                        <a:t>Peatland re-wetted</a:t>
+                      </a:r>
+                      <a:endParaRPr sz="1050" b="0" i="0">
+                        <a:solidFill>
+                          <a:srgbClr val="1F2723"/>
+                        </a:solidFill>
+                        <a:latin typeface="Arial"/>
+                      </a:endParaRPr>
+                    </a:p>
+                  </a:txBody>
+                  <a:tcPr marL="89611" marR="89611" marT="89611" marB="89611">
+                    <a:lnL w="0">
+                      <a:noFill/>
+                    </a:lnL>
+                    <a:lnR w="0">
+                      <a:noFill/>
+                    </a:lnR>
+                    <a:lnT w="19050">
+                      <a:solidFill>
+                        <a:srgbClr val="1F5A6E"/>
+                      </a:solidFill>
+                    </a:lnT>
+                    <a:lnB w="6350">
+                      <a:solidFill>
+                        <a:srgbClr val="CFCBBF"/>
+                      </a:solidFill>
+                    </a:lnB>
+                    <a:noFill/>
+                  </a:tcPr>
+                </a:tc>
+                <a:tc>
+                  <a:txBody>
+                    <a:bodyPr wrap="square"/>
+                    <a:lstStyle/>
+                    <a:p>
+                      <a:pPr algn="r"/>
+                      <a:r>
+                        <a:rPr sz="1050" b="0" i="0">
+                          <a:solidFill>
+                            <a:srgbClr val="1F2723"/>
+                          </a:solidFill>
+                          <a:latin typeface="Arial"/>
+                        </a:rPr>
+                        <a:t>1,260</a:t>
+                      </a:r>
+                      <a:endParaRPr sz="1050" b="0" i="0">
+                        <a:solidFill>
+                          <a:srgbClr val="1F2723"/>
+                        </a:solidFill>
+                        <a:latin typeface="Arial"/>
+                      </a:endParaRPr>
+                    </a:p>
+                  </a:txBody>
+                  <a:tcPr marL="89611" marR="89611" marT="89611" marB="89611">
+                    <a:lnL w="0">
+                      <a:noFill/>
+                    </a:lnL>
+                    <a:lnR w="0">
+                      <a:noFill/>
+                    </a:lnR>
+                    <a:lnT w="19050">
+                      <a:solidFill>
+                        <a:srgbClr val="1F5A6E"/>
+                      </a:solidFill>
+                    </a:lnT>
+                    <a:lnB w="6350">
+                      <a:solidFill>
+                        <a:srgbClr val="CFCBBF"/>
+                      </a:solidFill>
+                    </a:lnB>
+                    <a:noFill/>
+                  </a:tcPr>
+                </a:tc>
+                <a:tc>
+                  <a:txBody>
+                    <a:bodyPr wrap="square"/>
+                    <a:lstStyle/>
+                    <a:p>
+                      <a:pPr algn="r"/>
+                      <a:r>
+                        <a:rPr sz="1050" b="0" i="0">
+                          <a:solidFill>
+                            <a:srgbClr val="1F2723"/>
+                          </a:solidFill>
+                          <a:latin typeface="Arial"/>
+                        </a:rPr>
+                        <a:t>59%</a:t>
+                      </a:r>
+                      <a:endParaRPr sz="1050" b="0" i="0">
+                        <a:solidFill>
+                          <a:srgbClr val="1F2723"/>
+                        </a:solidFill>
+                        <a:latin typeface="Arial"/>
+                      </a:endParaRPr>
+                    </a:p>
+                  </a:txBody>
+                  <a:tcPr marL="89611" marR="89611" marT="89611" marB="89611">
+                    <a:lnL w="0">
+                      <a:noFill/>
+                    </a:lnL>
+                    <a:lnR w="0">
+                      <a:noFill/>
+                    </a:lnR>
+                    <a:lnT w="19050">
+                      <a:solidFill>
+                        <a:srgbClr val="1F5A6E"/>
+                      </a:solidFill>
+                    </a:lnT>
+                    <a:lnB w="6350">
+                      <a:solidFill>
+                        <a:srgbClr val="CFCBBF"/>
+                      </a:solidFill>
+                    </a:lnB>
+                    <a:noFill/>
+                  </a:tcPr>
+                </a:tc>
+              </a:tr>
+              <a:tr h="339242">
+                <a:tc>
+                  <a:txBody>
+                    <a:bodyPr wrap="square"/>
+                    <a:lstStyle/>
+                    <a:p>
+                      <a:pPr algn="l"/>
+                      <a:r>
+                        <a:rPr sz="1050" b="0" i="0">
+                          <a:solidFill>
+                            <a:srgbClr val="1F2723"/>
+                          </a:solidFill>
+                          <a:latin typeface="Arial"/>
+                        </a:rPr>
+                        <a:t>Native woodland planted</a:t>
+                      </a:r>
+                      <a:endParaRPr sz="1050" b="0" i="0">
+                        <a:solidFill>
+                          <a:srgbClr val="1F2723"/>
+                        </a:solidFill>
+                        <a:latin typeface="Arial"/>
+                      </a:endParaRPr>
+                    </a:p>
+                  </a:txBody>
+                  <a:tcPr marL="89611" marR="89611" marT="89611" marB="89611">
+                    <a:lnL w="0">
+                      <a:noFill/>
+                    </a:lnL>
+                    <a:lnR w="0">
+                      <a:noFill/>
+                    </a:lnR>
+                    <a:lnT w="6350">
+                      <a:solidFill>
+                        <a:srgbClr val="CFCBBF"/>
+                      </a:solidFill>
+                    </a:lnT>
+                    <a:lnB w="6350">
+                      <a:solidFill>
+                        <a:srgbClr val="CFCBBF"/>
+                      </a:solidFill>
+                    </a:lnB>
+                    <a:noFill/>
+                  </a:tcPr>
+                </a:tc>
+                <a:tc>
+                  <a:txBody>
+                    <a:bodyPr wrap="square"/>
+                    <a:lstStyle/>
+                    <a:p>
+                      <a:pPr algn="r"/>
+                      <a:r>
+                        <a:rPr sz="1050" b="0" i="0">
+                          <a:solidFill>
+                            <a:srgbClr val="1F2723"/>
+                          </a:solidFill>
+                          <a:latin typeface="Arial"/>
+                        </a:rPr>
+                        <a:t>540</a:t>
+                      </a:r>
+                      <a:endParaRPr sz="1050" b="0" i="0">
+                        <a:solidFill>
+                          <a:srgbClr val="1F2723"/>
+                        </a:solidFill>
+                        <a:latin typeface="Arial"/>
+                      </a:endParaRPr>
+                    </a:p>
+                  </a:txBody>
+                  <a:tcPr marL="89611" marR="89611" marT="89611" marB="89611">
+                    <a:lnL w="0">
+                      <a:noFill/>
+                    </a:lnL>
+                    <a:lnR w="0">
+                      <a:noFill/>
+                    </a:lnR>
+                    <a:lnT w="6350">
+                      <a:solidFill>
+                        <a:srgbClr val="CFCBBF"/>
+                      </a:solidFill>
+                    </a:lnT>
+                    <a:lnB w="6350">
+                      <a:solidFill>
+                        <a:srgbClr val="CFCBBF"/>
+                      </a:solidFill>
+                    </a:lnB>
+                    <a:noFill/>
+                  </a:tcPr>
+                </a:tc>
+                <a:tc>
+                  <a:txBody>
+                    <a:bodyPr wrap="square"/>
+                    <a:lstStyle/>
+                    <a:p>
+                      <a:pPr algn="r"/>
+                      <a:r>
+                        <a:rPr sz="1050" b="0" i="0">
+                          <a:solidFill>
+                            <a:srgbClr val="1F2723"/>
+                          </a:solidFill>
+                          <a:latin typeface="Arial"/>
+                        </a:rPr>
+                        <a:t>25%</a:t>
+                      </a:r>
+                      <a:endParaRPr sz="1050" b="0" i="0">
+                        <a:solidFill>
+                          <a:srgbClr val="1F2723"/>
+                        </a:solidFill>
+                        <a:latin typeface="Arial"/>
+                      </a:endParaRPr>
+                    </a:p>
+                  </a:txBody>
+                  <a:tcPr marL="89611" marR="89611" marT="89611" marB="89611">
+                    <a:lnL w="0">
+                      <a:noFill/>
+                    </a:lnL>
+                    <a:lnR w="0">
+                      <a:noFill/>
+                    </a:lnR>
+                    <a:lnT w="6350">
+                      <a:solidFill>
+                        <a:srgbClr val="CFCBBF"/>
+                      </a:solidFill>
+                    </a:lnT>
+                    <a:lnB w="6350">
+                      <a:solidFill>
+                        <a:srgbClr val="CFCBBF"/>
+                      </a:solidFill>
+                    </a:lnB>
+                    <a:noFill/>
+                  </a:tcPr>
+                </a:tc>
+              </a:tr>
+              <a:tr h="339242">
+                <a:tc>
+                  <a:txBody>
+                    <a:bodyPr wrap="square"/>
+                    <a:lstStyle/>
+                    <a:p>
+                      <a:pPr algn="l"/>
+                      <a:r>
+                        <a:rPr sz="1050" b="0" i="0">
+                          <a:solidFill>
+                            <a:srgbClr val="1F2723"/>
+                          </a:solidFill>
+                          <a:latin typeface="Arial"/>
+                        </a:rPr>
+                        <a:t>Wetland restored</a:t>
+                      </a:r>
+                      <a:endParaRPr sz="1050" b="0" i="0">
+                        <a:solidFill>
+                          <a:srgbClr val="1F2723"/>
+                        </a:solidFill>
+                        <a:latin typeface="Arial"/>
+                      </a:endParaRPr>
+                    </a:p>
+                  </a:txBody>
+                  <a:tcPr marL="89611" marR="89611" marT="89611" marB="89611">
+                    <a:lnL w="0">
+                      <a:noFill/>
+                    </a:lnL>
+                    <a:lnR w="0">
+                      <a:noFill/>
+                    </a:lnR>
+                    <a:lnT w="6350">
+                      <a:solidFill>
+                        <a:srgbClr val="CFCBBF"/>
+                      </a:solidFill>
+                    </a:lnT>
+                    <a:lnB w="19050">
+                      <a:solidFill>
+                        <a:srgbClr val="1F5A6E"/>
+                      </a:solidFill>
+                    </a:lnB>
+                    <a:noFill/>
+                  </a:tcPr>
+                </a:tc>
+                <a:tc>
+                  <a:txBody>
+                    <a:bodyPr wrap="square"/>
+                    <a:lstStyle/>
+                    <a:p>
+                      <a:pPr algn="r"/>
+                      <a:r>
+                        <a:rPr sz="1050" b="0" i="0">
+                          <a:solidFill>
+                            <a:srgbClr val="1F2723"/>
+                          </a:solidFill>
+                          <a:latin typeface="Arial"/>
+                        </a:rPr>
+                        <a:t>340</a:t>
+                      </a:r>
+                      <a:endParaRPr sz="1050" b="0" i="0">
+                        <a:solidFill>
+                          <a:srgbClr val="1F2723"/>
+                        </a:solidFill>
+                        <a:latin typeface="Arial"/>
+                      </a:endParaRPr>
+                    </a:p>
+                  </a:txBody>
+                  <a:tcPr marL="89611" marR="89611" marT="89611" marB="89611">
+                    <a:lnL w="0">
+                      <a:noFill/>
+                    </a:lnL>
+                    <a:lnR w="0">
+                      <a:noFill/>
+                    </a:lnR>
+                    <a:lnT w="6350">
+                      <a:solidFill>
+                        <a:srgbClr val="CFCBBF"/>
+                      </a:solidFill>
+                    </a:lnT>
+                    <a:lnB w="19050">
+                      <a:solidFill>
+                        <a:srgbClr val="1F5A6E"/>
+                      </a:solidFill>
+                    </a:lnB>
+                    <a:noFill/>
+                  </a:tcPr>
+                </a:tc>
+                <a:tc>
+                  <a:txBody>
+                    <a:bodyPr wrap="square"/>
+                    <a:lstStyle/>
+                    <a:p>
+                      <a:pPr algn="r"/>
+                      <a:r>
+                        <a:rPr sz="1050" b="0" i="0">
+                          <a:solidFill>
+                            <a:srgbClr val="1F2723"/>
+                          </a:solidFill>
+                          <a:latin typeface="Arial"/>
+                        </a:rPr>
+                        <a:t>16%</a:t>
+                      </a:r>
+                      <a:endParaRPr sz="1050" b="0" i="0">
+                        <a:solidFill>
+                          <a:srgbClr val="1F2723"/>
+                        </a:solidFill>
+                        <a:latin typeface="Arial"/>
+                      </a:endParaRPr>
+                    </a:p>
+                  </a:txBody>
+                  <a:tcPr marL="89611" marR="89611" marT="89611" marB="89611">
+                    <a:lnL w="0">
+                      <a:noFill/>
+                    </a:lnL>
+                    <a:lnR w="0">
+                      <a:noFill/>
+                    </a:lnR>
+                    <a:lnT w="6350">
+                      <a:solidFill>
+                        <a:srgbClr val="CFCBBF"/>
+                      </a:solidFill>
+                    </a:lnT>
+                    <a:lnB w="19050">
+                      <a:solidFill>
+                        <a:srgbClr val="1F5A6E"/>
+                      </a:solidFill>
+                    </a:lnB>
+                    <a:noFill/>
+                  </a:tcPr>
+                </a:tc>
+              </a:tr>
+              <a:tr h="339242">
+                <a:tc>
+                  <a:txBody>
+                    <a:bodyPr wrap="square"/>
+                    <a:lstStyle/>
+                    <a:p>
+                      <a:pPr algn="l"/>
+                      <a:r>
+                        <a:rPr sz="1050" b="1" i="0">
+                          <a:solidFill>
+                            <a:srgbClr val="1F2723"/>
+                          </a:solidFill>
+                          <a:latin typeface="Arial"/>
+                        </a:rPr>
+                        <a:t>Total</a:t>
+                      </a:r>
+                      <a:endParaRPr sz="1050" b="1" i="0">
+                        <a:solidFill>
+                          <a:srgbClr val="1F2723"/>
+                        </a:solidFill>
+                        <a:latin typeface="Arial"/>
+                      </a:endParaRPr>
+                    </a:p>
+                  </a:txBody>
+                  <a:tcPr marL="89611" marR="89611" marT="89611" marB="89611">
+                    <a:lnL w="0">
+                      <a:noFill/>
+                    </a:lnL>
+                    <a:lnR w="0">
+                      <a:noFill/>
+                    </a:lnR>
+                    <a:lnT w="19050">
+                      <a:solidFill>
+                        <a:srgbClr val="1F5A6E"/>
+                      </a:solidFill>
+                    </a:lnT>
+                    <a:lnB w="9525">
+                      <a:solidFill>
+                        <a:srgbClr val="1F5A6E"/>
+                      </a:solidFill>
+                    </a:lnB>
+                    <a:noFill/>
+                  </a:tcPr>
+                </a:tc>
+                <a:tc>
+                  <a:txBody>
+                    <a:bodyPr wrap="square"/>
+                    <a:lstStyle/>
+                    <a:p>
+                      <a:pPr algn="r"/>
+                      <a:r>
+                        <a:rPr sz="1050" b="1" i="0">
+                          <a:solidFill>
+                            <a:srgbClr val="1F2723"/>
+                          </a:solidFill>
+                          <a:latin typeface="Arial"/>
+                        </a:rPr>
+                        <a:t>2,140</a:t>
+                      </a:r>
+                      <a:endParaRPr sz="1050" b="1" i="0">
+                        <a:solidFill>
+                          <a:srgbClr val="1F2723"/>
+                        </a:solidFill>
+                        <a:latin typeface="Arial"/>
+                      </a:endParaRPr>
+                    </a:p>
+                  </a:txBody>
+                  <a:tcPr marL="89611" marR="89611" marT="89611" marB="89611">
+                    <a:lnL w="0">
+                      <a:noFill/>
+                    </a:lnL>
+                    <a:lnR w="0">
+                      <a:noFill/>
+                    </a:lnR>
+                    <a:lnT w="19050">
+                      <a:solidFill>
+                        <a:srgbClr val="1F5A6E"/>
+                      </a:solidFill>
+                    </a:lnT>
+                    <a:lnB w="9525">
+                      <a:solidFill>
+                        <a:srgbClr val="1F5A6E"/>
+                      </a:solidFill>
+                    </a:lnB>
+                    <a:noFill/>
+                  </a:tcPr>
+                </a:tc>
+                <a:tc>
+                  <a:txBody>
+                    <a:bodyPr wrap="square"/>
+                    <a:lstStyle/>
+                    <a:p>
+                      <a:pPr algn="r"/>
+                      <a:r>
+                        <a:rPr sz="1050" b="1" i="0">
+                          <a:solidFill>
+                            <a:srgbClr val="1F2723"/>
+                          </a:solidFill>
+                          <a:latin typeface="Arial"/>
+                        </a:rPr>
+                        <a:t>100%</a:t>
+                      </a:r>
+                      <a:endParaRPr sz="1050" b="1" i="0">
+                        <a:solidFill>
+                          <a:srgbClr val="1F2723"/>
+                        </a:solidFill>
+                        <a:latin typeface="Arial"/>
+                      </a:endParaRPr>
+                    </a:p>
+                  </a:txBody>
+                  <a:tcPr marL="89611" marR="89611" marT="89611" marB="89611">
+                    <a:lnL w="0">
+                      <a:noFill/>
+                    </a:lnL>
+                    <a:lnR w="0">
+                      <a:noFill/>
+                    </a:lnR>
+                    <a:lnT w="19050">
+                      <a:solidFill>
+                        <a:srgbClr val="1F5A6E"/>
+                      </a:solidFill>
+                    </a:lnT>
+                    <a:lnB w="9525">
+                      <a:solidFill>
+                        <a:srgbClr val="1F5A6E"/>
+                      </a:solidFill>
+                    </a:lnB>
+                    <a:noFill/>
+                  </a:tcPr>
+                </a:tc>
+              </a:tr>
+            </a:tbl>
+          </a:graphicData>
+        </a:graphic>
+      </p:graphicFrame>
+      <p:sp>
+        <p:nvSpPr>
+          <p:cNvPr id="12" name="why"/>
+          <p:cNvSpPr/>
+          <p:nvPr/>
+        </p:nvSpPr>
+        <p:spPr>
+          <a:xfrm>
+            <a:off x="8123824" y="4623613"/>
+            <a:ext cx="3351287" cy="1119124"/>
+          </a:xfrm>
+          <a:prstGeom prst="rect">
+            <a:avLst/>
+          </a:prstGeom>
+          <a:noFill/>
+        </p:spPr>
+        <p:txBody>
+          <a:bodyPr wrap="square" lIns="0" tIns="0" rIns="0" bIns="0" anchor="t">
+            <a:noAutofit/>
+          </a:bodyPr>
+          <a:lstStyle/>
+          <a:p>
+            <a:pPr algn="l" marL="0" indent="0">
+              <a:lnSpc>
+                <a:spcPts val="1440"/>
+              </a:lnSpc>
+              <a:spcBef>
+                <a:spcPts val="588"/>
+              </a:spcBef>
+              <a:spcAft>
+                <a:spcPts val="196"/>
+              </a:spcAft>
+              <a:buNone/>
+            </a:pPr>
+            <a:r>
+              <a:rPr sz="1200" b="1" i="0">
+                <a:solidFill>
+                  <a:srgbClr val="1F2723"/>
+                </a:solidFill>
+                <a:latin typeface="Arial"/>
+              </a:rPr>
+              <a:t>Why three species fell</a:t>
             </a:r>
           </a:p>
           <a:p>
@@ -7014,7 +7764,7 @@
                 <a:spcPts val="0"/>
               </a:spcBef>
               <a:spcAft>
-                <a:spcPts val="600"/>
+                <a:spcPts val="588"/>
               </a:spcAft>
               <a:buNone/>
             </a:pPr>
@@ -7023,168 +7773,53 @@
                 <a:solidFill>
                   <a:srgbClr val="1F2723"/>
                 </a:solidFill>
-                <a:latin typeface="Inter"/>
+                <a:latin typeface="Arial"/>
               </a:rPr>
-              <a:t>1,260 ha of peatland re-wetted</a:t>
-            </a:r>
-          </a:p>
-          <a:p>
-            <a:pPr algn="l" marL="0" indent="0">
-              <a:lnSpc>
-                <a:spcPts val="1500"/>
-              </a:lnSpc>
-              <a:spcBef>
-                <a:spcPts val="0"/>
-              </a:spcBef>
-              <a:spcAft>
-                <a:spcPts val="600"/>
-              </a:spcAft>
-              <a:buNone/>
-            </a:pPr>
+              <a:t>Salmon and pearl mussels need cool, clean</a:t>
+            </a:r>
+            <a:br/>
             <a:r>
               <a:rPr sz="1200" b="0" i="0">
                 <a:solidFill>
                   <a:srgbClr val="1F2723"/>
                 </a:solidFill>
-                <a:latin typeface="Inter"/>
+                <a:latin typeface="Arial"/>
               </a:rPr>
-              <a:t>540 ha of native woodland planted</a:t>
-            </a:r>
-          </a:p>
-          <a:p>
-            <a:pPr algn="l" marL="0" indent="0">
-              <a:lnSpc>
-                <a:spcPts val="1500"/>
-              </a:lnSpc>
-              <a:spcBef>
-                <a:spcPts val="0"/>
-              </a:spcBef>
-              <a:spcAft>
-                <a:spcPts val="600"/>
-              </a:spcAft>
-              <a:buNone/>
-            </a:pPr>
+              <a:t>rivers; warmer summers and silt from eroding</a:t>
+            </a:r>
+            <a:br/>
             <a:r>
               <a:rPr sz="1200" b="0" i="0">
                 <a:solidFill>
                   <a:srgbClr val="1F2723"/>
                 </a:solidFill>
-                <a:latin typeface="Inter"/>
+                <a:latin typeface="Arial"/>
               </a:rPr>
-              <a:t>340 ha of wetland restored</a:t>
-            </a:r>
-          </a:p>
-        </p:txBody>
-      </p:sp>
-      <p:sp>
-        <p:nvSpPr>
-          <p:cNvPr id="11" name="why"/>
-          <p:cNvSpPr/>
-          <p:nvPr/>
-        </p:nvSpPr>
-        <p:spPr>
-          <a:xfrm>
-            <a:off x="8126599" y="3493770"/>
-            <a:ext cx="3333881" cy="1122680"/>
-          </a:xfrm>
-          <a:prstGeom prst="rect">
-            <a:avLst/>
-          </a:prstGeom>
-          <a:noFill/>
-        </p:spPr>
-        <p:txBody>
-          <a:bodyPr wrap="square" lIns="0" tIns="0" rIns="0" bIns="0" anchor="t">
-            <a:noAutofit/>
-          </a:bodyPr>
-          <a:lstStyle/>
-          <a:p>
-            <a:pPr algn="l" marL="0" indent="0">
-              <a:lnSpc>
-                <a:spcPts val="1440"/>
-              </a:lnSpc>
-              <a:spcBef>
-                <a:spcPts val="600"/>
-              </a:spcBef>
-              <a:spcAft>
-                <a:spcPts val="200"/>
-              </a:spcAft>
-              <a:buNone/>
-            </a:pPr>
-            <a:r>
-              <a:rPr sz="1200" b="1" i="0">
-                <a:solidFill>
-                  <a:srgbClr val="1F2723"/>
-                </a:solidFill>
-                <a:latin typeface="Inter"/>
-              </a:rPr>
-              <a:t>Why three species fell</a:t>
-            </a:r>
-          </a:p>
-          <a:p>
-            <a:pPr algn="l" marL="0" indent="0">
-              <a:lnSpc>
-                <a:spcPts val="1500"/>
-              </a:lnSpc>
-              <a:spcBef>
-                <a:spcPts val="0"/>
-              </a:spcBef>
-              <a:spcAft>
-                <a:spcPts val="600"/>
-              </a:spcAft>
-              <a:buNone/>
-            </a:pPr>
+              <a:t>banks harm both. Capercaillie are disturbed by</a:t>
+            </a:r>
+            <a:br/>
             <a:r>
               <a:rPr sz="1200" b="0" i="0">
                 <a:solidFill>
                   <a:srgbClr val="1F2723"/>
                 </a:solidFill>
-                <a:latin typeface="Inter"/>
+                <a:latin typeface="Arial"/>
               </a:rPr>
-              <a:t>Salmon and pearl mussels need cool, clean</a:t>
-            </a:r>
-            <a:br/>
-            <a:r>
-              <a:rPr sz="1200" b="0" i="0">
-                <a:solidFill>
-                  <a:srgbClr val="1F2723"/>
-                </a:solidFill>
-                <a:latin typeface="Inter"/>
-              </a:rPr>
-              <a:t>rivers; warmer summers and silt from eroding</a:t>
-            </a:r>
-            <a:br/>
-            <a:r>
-              <a:rPr sz="1200" b="0" i="0">
-                <a:solidFill>
-                  <a:srgbClr val="1F2723"/>
-                </a:solidFill>
-                <a:latin typeface="Inter"/>
-              </a:rPr>
-              <a:t>banks harm both. Capercaillie are disturbed</a:t>
-            </a:r>
-            <a:br/>
-            <a:r>
-              <a:rPr sz="1200" b="0" i="0">
-                <a:solidFill>
-                  <a:srgbClr val="1F2723"/>
-                </a:solidFill>
-                <a:latin typeface="Inter"/>
-              </a:rPr>
-              <a:t>by walkers leaving the path in old pinewood.</a:t>
-            </a:r>
-          </a:p>
-        </p:txBody>
-      </p:sp>
-      <p:sp>
-        <p:nvSpPr>
-          <p:cNvPr id="12" name="ha"/>
+              <a:t>walkers leaving the path in old pinewood.</a:t>
+            </a:r>
+          </a:p>
+        </p:txBody>
+      </p:sp>
+      <p:sp>
+        <p:nvSpPr>
+          <p:cNvPr id="13" name="source"/>
           <p:cNvSpPr/>
           <p:nvPr/>
         </p:nvSpPr>
         <p:spPr>
           <a:xfrm>
-            <a:off x="8126599" y="4707890"/>
-            <a:ext cx="3333881" cy="129540"/>
+            <a:off x="537667" y="6190793"/>
+            <a:ext cx="11116666" cy="129540"/>
           </a:xfrm>
           <a:prstGeom prst="rect">
             <a:avLst/>
@@ -7214,53 +7849,7 @@
                 <a:solidFill>
                   <a:srgbClr val="58615B"/>
                 </a:solidFill>
-                <a:latin typeface="Inter"/>
-              </a:rPr>
-              <a:t>A hectare is a square 100 m by 100 m.</a:t>
-            </a:r>
-          </a:p>
-        </p:txBody>
-      </p:sp>
-      <p:sp>
-        <p:nvSpPr>
-          <p:cNvPr id="13" name="source"/>
-          <p:cNvSpPr/>
-          <p:nvPr/>
-        </p:nvSpPr>
-        <p:spPr>
-          <a:xfrm>
-            <a:off x="548640" y="6179820"/>
-            <a:ext cx="11094720" cy="129540"/>
-          </a:xfrm>
-          <a:prstGeom prst="rect">
-            <a:avLst/>
-          </a:prstGeom>
-          <a:noFill/>
-        </p:spPr>
-        <p:txBody>
-          <a:bodyPr wrap="square" lIns="0" tIns="0" rIns="0" bIns="0" anchor="t">
-            <a:noAutofit/>
-          </a:bodyPr>
-          <a:lstStyle/>
-          <a:p>
-            <a:pPr algn="l" marL="0" indent="0">
-              <a:lnSpc>
-                <a:spcPts val="1020"/>
-              </a:lnSpc>
-              <a:spcBef>
-                <a:spcPts val="0"/>
-              </a:spcBef>
-              <a:spcAft>
-                <a:spcPts val="0"/>
-              </a:spcAft>
-              <a:buNone/>
-            </a:pPr>
-            <a:r>
-              <a:rPr sz="850" b="0" i="0">
-                <a:solidFill>
-                  <a:srgbClr val="58615B"/>
-                </a:solidFill>
-                <a:latin typeface="Inter"/>
+                <a:latin typeface="Arial"/>
               </a:rPr>
               <a:t>Species are counted by rangers and volunteers each spring against the 2021 baseline count. Source: Brannoch National Parks Service records, April 2025 to March 2026. Illustrative figures for a fictional service.</a:t>
             </a:r>
@@ -7275,8 +7864,8 @@
         </p:nvSpPr>
         <p:spPr>
           <a:xfrm>
-            <a:off x="4293042" y="4611545"/>
-            <a:ext cx="45720" cy="1147730"/>
+            <a:off x="4288124" y="4612198"/>
+            <a:ext cx="44806" cy="1161750"/>
           </a:xfrm>
           <a:prstGeom prst="rightBracket">
             <a:avLst/>
@@ -7304,8 +7893,8 @@
         </p:nvSpPr>
         <p:spPr>
           <a:xfrm>
-            <a:off x="4521642" y="5025390"/>
-            <a:ext cx="2201350" cy="320040"/>
+            <a:off x="4512152" y="5033053"/>
+            <a:ext cx="2147567" cy="320040"/>
           </a:xfrm>
           <a:prstGeom prst="rect">
             <a:avLst/>
@@ -7335,7 +7924,7 @@
                 <a:solidFill>
                   <a:srgbClr val="B4561A"/>
                 </a:solidFill>
-                <a:latin typeface="Inter"/>
+                <a:latin typeface="Arial"/>
               </a:rPr>
               <a:t>Fell since 2021: next year's focus</a:t>
             </a:r>
@@ -7345,7 +7934,7 @@
                 <a:solidFill>
                   <a:srgbClr val="B4561A"/>
                 </a:solidFill>
-                <a:latin typeface="Inter"/>
+                <a:latin typeface="Arial"/>
               </a:rPr>
               <a:t>is their rivers and pinewood</a:t>
             </a:r>
@@ -7429,7 +8018,7 @@
                 <a:solidFill>
                   <a:srgbClr val="58615B"/>
                 </a:solidFill>
-                <a:latin typeface="Inter"/>
+                <a:latin typeface="Arial"/>
               </a:rPr>
               <a:t>Brannoch National Parks Service  |  Annual Report 2025-26</a:t>
             </a:r>
@@ -7464,7 +8053,7 @@
                 <a:solidFill>
                   <a:srgbClr val="58615B"/>
                 </a:solidFill>
-                <a:latin typeface="Inter"/>
+                <a:latin typeface="Arial"/>
               </a:rPr>
               <a:t>1</a:t>
             </a:fld>
@@ -7539,7 +8128,7 @@
                 <a:solidFill>
                   <a:srgbClr val="FFFFFF"/>
                 </a:solidFill>
-                <a:latin typeface="Gelasio"/>
+                <a:latin typeface="Georgia"/>
               </a:rPr>
               <a:t>3</a:t>
             </a:r>
@@ -7585,7 +8174,7 @@
                 <a:solidFill>
                   <a:srgbClr val="1F5A6E"/>
                 </a:solidFill>
-                <a:latin typeface="Inter"/>
+                <a:latin typeface="Arial"/>
               </a:rPr>
               <a:t>BUDGET AND WHERE IT GOES</a:t>
             </a:r>
@@ -7631,7 +8220,7 @@
                 <a:solidFill>
                   <a:srgbClr val="1F2723"/>
                 </a:solidFill>
-                <a:latin typeface="Gelasio"/>
+                <a:latin typeface="Georgia"/>
               </a:rPr>
               <a:t>Of every $100 we spent, $32 went to conservation and $10 to</a:t>
             </a:r>
@@ -7641,7 +8230,7 @@
                 <a:solidFill>
                   <a:srgbClr val="1F2723"/>
                 </a:solidFill>
-                <a:latin typeface="Gelasio"/>
+                <a:latin typeface="Georgia"/>
               </a:rPr>
               <a:t>running the service</a:t>
             </a:r>
@@ -7687,9 +8276,9 @@
                 <a:solidFill>
                   <a:srgbClr val="1F2723"/>
                 </a:solidFill>
-                <a:latin typeface="Inter"/>
+                <a:latin typeface="Arial"/>
               </a:rPr>
-              <a:t>We received $148.3m, 5.3% more than last year, and spent $145.1m. The $3.2m left over is set aside for repairs. The government grant paid 65% of our</a:t>
+              <a:t>We received $148.3m, 5.3% more than last year, and spent $145.1m. The $3.2m left over is set aside for repairs. The government grant paid 65% of our income;</a:t>
             </a:r>
             <a:br/>
             <a:r>
@@ -7697,9 +8286,9 @@
                 <a:solidFill>
                   <a:srgbClr val="1F2723"/>
                 </a:solidFill>
-                <a:latin typeface="Inter"/>
+                <a:latin typeface="Arial"/>
               </a:rPr>
-              <a:t>income; visitors, shops, donors and trusts gave the other $51.9m.</a:t>
+              <a:t>visitors, shops, donors and trusts gave the other $51.9m.</a:t>
             </a:r>
           </a:p>
         </p:txBody>
@@ -7743,7 +8332,7 @@
                 <a:solidFill>
                   <a:srgbClr val="1F2723"/>
                 </a:solidFill>
-                <a:latin typeface="Gelasio"/>
+                <a:latin typeface="Georgia"/>
               </a:rPr>
               <a:t>Where each $100 went</a:t>
             </a:r>
@@ -7789,7 +8378,7 @@
                 <a:solidFill>
                   <a:srgbClr val="58615B"/>
                 </a:solidFill>
-                <a:latin typeface="Inter"/>
+                <a:latin typeface="Arial"/>
               </a:rPr>
               <a:t>Dollars of every $100 spent in 2025-26; the area's spending in $m after its name</a:t>
             </a:r>
@@ -7853,7 +8442,7 @@
                 <a:solidFill>
                   <a:srgbClr val="1F2723"/>
                 </a:solidFill>
-                <a:latin typeface="Gelasio"/>
+                <a:latin typeface="Georgia"/>
               </a:rPr>
               <a:t>Where the money came from</a:t>
             </a:r>
@@ -7899,7 +8488,7 @@
                 <a:solidFill>
                   <a:srgbClr val="58615B"/>
                 </a:solidFill>
-                <a:latin typeface="Inter"/>
+                <a:latin typeface="Arial"/>
               </a:rPr>
               <a:t>Income, $m</a:t>
             </a:r>
@@ -7939,7 +8528,7 @@
                           <a:solidFill>
                             <a:srgbClr val="1F2723"/>
                           </a:solidFill>
-                          <a:latin typeface="Inter"/>
+                          <a:latin typeface="Arial"/>
                         </a:rPr>
                         <a:t>Source</a:t>
                       </a:r>
@@ -7947,7 +8536,7 @@
                         <a:solidFill>
                           <a:srgbClr val="1F2723"/>
                         </a:solidFill>
-                        <a:latin typeface="Inter"/>
+                        <a:latin typeface="Arial"/>
                       </a:endParaRPr>
                     </a:p>
                   </a:txBody>
@@ -7980,7 +8569,7 @@
                           <a:solidFill>
                             <a:srgbClr val="1F2723"/>
                           </a:solidFill>
-                          <a:latin typeface="Inter"/>
+                          <a:latin typeface="Arial"/>
                         </a:rPr>
                         <a:t>2024-25</a:t>
                       </a:r>
@@ -7988,7 +8577,7 @@
                         <a:solidFill>
                           <a:srgbClr val="1F2723"/>
                         </a:solidFill>
-                        <a:latin typeface="Inter"/>
+                        <a:latin typeface="Arial"/>
                       </a:endParaRPr>
                     </a:p>
                   </a:txBody>
@@ -8021,7 +8610,7 @@
                           <a:solidFill>
                             <a:srgbClr val="1F2723"/>
                           </a:solidFill>
-                          <a:latin typeface="Inter"/>
+                          <a:latin typeface="Arial"/>
                         </a:rPr>
                         <a:t>2025-26</a:t>
                       </a:r>
@@ -8029,7 +8618,7 @@
                         <a:solidFill>
                           <a:srgbClr val="1F2723"/>
                         </a:solidFill>
-                        <a:latin typeface="Inter"/>
+                        <a:latin typeface="Arial"/>
                       </a:endParaRPr>
                     </a:p>
                   </a:txBody>
@@ -8064,7 +8653,7 @@
                           <a:solidFill>
                             <a:srgbClr val="1F2723"/>
                           </a:solidFill>
-                          <a:latin typeface="Inter"/>
+                          <a:latin typeface="Arial"/>
                         </a:rPr>
                         <a:t>Government grant</a:t>
                       </a:r>
@@ -8072,7 +8661,7 @@
                         <a:solidFill>
                           <a:srgbClr val="1F2723"/>
                         </a:solidFill>
-                        <a:latin typeface="Inter"/>
+                        <a:latin typeface="Arial"/>
                       </a:endParaRPr>
                     </a:p>
                   </a:txBody>
@@ -8107,7 +8696,7 @@
                           <a:solidFill>
                             <a:srgbClr val="1F2723"/>
                           </a:solidFill>
-                          <a:latin typeface="Inter"/>
+                          <a:latin typeface="Arial"/>
                         </a:rPr>
                         <a:t>94.0</a:t>
                       </a:r>
@@ -8115,7 +8704,7 @@
                         <a:solidFill>
                           <a:srgbClr val="1F2723"/>
                         </a:solidFill>
-                        <a:latin typeface="Inter"/>
+                        <a:latin typeface="Arial"/>
                       </a:endParaRPr>
                     </a:p>
                   </a:txBody>
@@ -8150,7 +8739,7 @@
                           <a:solidFill>
                             <a:srgbClr val="1F2723"/>
                           </a:solidFill>
-                          <a:latin typeface="Inter"/>
+                          <a:latin typeface="Arial"/>
                         </a:rPr>
                         <a:t>96.4</a:t>
                       </a:r>
@@ -8158,7 +8747,7 @@
                         <a:solidFill>
                           <a:srgbClr val="1F2723"/>
                         </a:solidFill>
-                        <a:latin typeface="Inter"/>
+                        <a:latin typeface="Arial"/>
                       </a:endParaRPr>
                     </a:p>
                   </a:txBody>
@@ -8195,7 +8784,7 @@
                           <a:solidFill>
                             <a:srgbClr val="1F2723"/>
                           </a:solidFill>
-                          <a:latin typeface="Inter"/>
+                          <a:latin typeface="Arial"/>
                         </a:rPr>
                         <a:t>Parking, camping and permits</a:t>
                       </a:r>
@@ -8203,7 +8792,7 @@
                         <a:solidFill>
                           <a:srgbClr val="1F2723"/>
                         </a:solidFill>
-                        <a:latin typeface="Inter"/>
+                        <a:latin typeface="Arial"/>
                       </a:endParaRPr>
                     </a:p>
                   </a:txBody>
@@ -8238,7 +8827,7 @@
                           <a:solidFill>
                             <a:srgbClr val="1F2723"/>
                           </a:solidFill>
-                          <a:latin typeface="Inter"/>
+                          <a:latin typeface="Arial"/>
                         </a:rPr>
                         <a:t>25.9</a:t>
                       </a:r>
@@ -8246,7 +8835,7 @@
                         <a:solidFill>
                           <a:srgbClr val="1F2723"/>
                         </a:solidFill>
-                        <a:latin typeface="Inter"/>
+                        <a:latin typeface="Arial"/>
                       </a:endParaRPr>
                     </a:p>
                   </a:txBody>
@@ -8281,7 +8870,7 @@
                           <a:solidFill>
                             <a:srgbClr val="1F2723"/>
                           </a:solidFill>
-                          <a:latin typeface="Inter"/>
+                          <a:latin typeface="Arial"/>
                         </a:rPr>
                         <a:t>28.7</a:t>
                       </a:r>
@@ -8289,7 +8878,7 @@
                         <a:solidFill>
                           <a:srgbClr val="1F2723"/>
                         </a:solidFill>
-                        <a:latin typeface="Inter"/>
+                        <a:latin typeface="Arial"/>
                       </a:endParaRPr>
                     </a:p>
                   </a:txBody>
@@ -8326,7 +8915,7 @@
                           <a:solidFill>
                             <a:srgbClr val="1F2723"/>
                           </a:solidFill>
-                          <a:latin typeface="Inter"/>
+                          <a:latin typeface="Arial"/>
                         </a:rPr>
                         <a:t>Shops, cafes and leases</a:t>
                       </a:r>
@@ -8334,7 +8923,7 @@
                         <a:solidFill>
                           <a:srgbClr val="1F2723"/>
                         </a:solidFill>
-                        <a:latin typeface="Inter"/>
+                        <a:latin typeface="Arial"/>
                       </a:endParaRPr>
                     </a:p>
                   </a:txBody>
@@ -8369,7 +8958,7 @@
                           <a:solidFill>
                             <a:srgbClr val="1F2723"/>
                           </a:solidFill>
-                          <a:latin typeface="Inter"/>
+                          <a:latin typeface="Arial"/>
                         </a:rPr>
                         <a:t>10.6</a:t>
                       </a:r>
@@ -8377,7 +8966,7 @@
                         <a:solidFill>
                           <a:srgbClr val="1F2723"/>
                         </a:solidFill>
-                        <a:latin typeface="Inter"/>
+                        <a:latin typeface="Arial"/>
                       </a:endParaRPr>
                     </a:p>
                   </a:txBody>
@@ -8412,7 +9001,7 @@
                           <a:solidFill>
                             <a:srgbClr val="1F2723"/>
                           </a:solidFill>
-                          <a:latin typeface="Inter"/>
+                          <a:latin typeface="Arial"/>
                         </a:rPr>
                         <a:t>11.2</a:t>
                       </a:r>
@@ -8420,7 +9009,7 @@
                         <a:solidFill>
                           <a:srgbClr val="1F2723"/>
                         </a:solidFill>
-                        <a:latin typeface="Inter"/>
+                        <a:latin typeface="Arial"/>
                       </a:endParaRPr>
                     </a:p>
                   </a:txBody>
@@ -8457,7 +9046,7 @@
                           <a:solidFill>
                             <a:srgbClr val="1F2723"/>
                           </a:solidFill>
-                          <a:latin typeface="Inter"/>
+                          <a:latin typeface="Arial"/>
                         </a:rPr>
                         <a:t>Donations and legacies</a:t>
                       </a:r>
@@ -8465,7 +9054,7 @@
                         <a:solidFill>
                           <a:srgbClr val="1F2723"/>
                         </a:solidFill>
-                        <a:latin typeface="Inter"/>
+                        <a:latin typeface="Arial"/>
                       </a:endParaRPr>
                     </a:p>
                   </a:txBody>
@@ -8500,7 +9089,7 @@
                           <a:solidFill>
                             <a:srgbClr val="1F2723"/>
                           </a:solidFill>
-                          <a:latin typeface="Inter"/>
+                          <a:latin typeface="Arial"/>
                         </a:rPr>
                         <a:t>6.8</a:t>
                       </a:r>
@@ -8508,7 +9097,7 @@
                         <a:solidFill>
                           <a:srgbClr val="1F2723"/>
                         </a:solidFill>
-                        <a:latin typeface="Inter"/>
+                        <a:latin typeface="Arial"/>
                       </a:endParaRPr>
                     </a:p>
                   </a:txBody>
@@ -8543,7 +9132,7 @@
                           <a:solidFill>
                             <a:srgbClr val="1F2723"/>
                           </a:solidFill>
-                          <a:latin typeface="Inter"/>
+                          <a:latin typeface="Arial"/>
                         </a:rPr>
                         <a:t>7.9</a:t>
                       </a:r>
@@ -8551,7 +9140,7 @@
                         <a:solidFill>
                           <a:srgbClr val="1F2723"/>
                         </a:solidFill>
-                        <a:latin typeface="Inter"/>
+                        <a:latin typeface="Arial"/>
                       </a:endParaRPr>
                     </a:p>
                   </a:txBody>
@@ -8588,7 +9177,7 @@
                           <a:solidFill>
                             <a:srgbClr val="1F2723"/>
                           </a:solidFill>
-                          <a:latin typeface="Inter"/>
+                          <a:latin typeface="Arial"/>
                         </a:rPr>
                         <a:t>Grants from trusts</a:t>
                       </a:r>
@@ -8596,7 +9185,7 @@
                         <a:solidFill>
                           <a:srgbClr val="1F2723"/>
                         </a:solidFill>
-                        <a:latin typeface="Inter"/>
+                        <a:latin typeface="Arial"/>
                       </a:endParaRPr>
                     </a:p>
                   </a:txBody>
@@ -8631,7 +9220,7 @@
                           <a:solidFill>
                             <a:srgbClr val="1F2723"/>
                           </a:solidFill>
-                          <a:latin typeface="Inter"/>
+                          <a:latin typeface="Arial"/>
                         </a:rPr>
                         <a:t>3.5</a:t>
                       </a:r>
@@ -8639,7 +9228,7 @@
                         <a:solidFill>
                           <a:srgbClr val="1F2723"/>
                         </a:solidFill>
-                        <a:latin typeface="Inter"/>
+                        <a:latin typeface="Arial"/>
                       </a:endParaRPr>
                     </a:p>
                   </a:txBody>
@@ -8674,7 +9263,7 @@
                           <a:solidFill>
                             <a:srgbClr val="1F2723"/>
                           </a:solidFill>
-                          <a:latin typeface="Inter"/>
+                          <a:latin typeface="Arial"/>
                         </a:rPr>
                         <a:t>4.1</a:t>
                       </a:r>
@@ -8682,7 +9271,7 @@
                         <a:solidFill>
                           <a:srgbClr val="1F2723"/>
                         </a:solidFill>
-                        <a:latin typeface="Inter"/>
+                        <a:latin typeface="Arial"/>
                       </a:endParaRPr>
                     </a:p>
                   </a:txBody>
@@ -8719,7 +9308,7 @@
                           <a:solidFill>
                             <a:srgbClr val="1F2723"/>
                           </a:solidFill>
-                          <a:latin typeface="Inter"/>
+                          <a:latin typeface="Arial"/>
                         </a:rPr>
                         <a:t>Total income</a:t>
                       </a:r>
@@ -8727,7 +9316,7 @@
                         <a:solidFill>
                           <a:srgbClr val="1F2723"/>
                         </a:solidFill>
-                        <a:latin typeface="Inter"/>
+                        <a:latin typeface="Arial"/>
                       </a:endParaRPr>
                     </a:p>
                   </a:txBody>
@@ -8762,7 +9351,7 @@
                           <a:solidFill>
                             <a:srgbClr val="1F2723"/>
                           </a:solidFill>
-                          <a:latin typeface="Inter"/>
+                          <a:latin typeface="Arial"/>
                         </a:rPr>
                         <a:t>140.8</a:t>
                       </a:r>
@@ -8770,7 +9359,7 @@
                         <a:solidFill>
                           <a:srgbClr val="1F2723"/>
                         </a:solidFill>
-                        <a:latin typeface="Inter"/>
+                        <a:latin typeface="Arial"/>
                       </a:endParaRPr>
                     </a:p>
                   </a:txBody>
@@ -8805,7 +9394,7 @@
                           <a:solidFill>
                             <a:srgbClr val="1F2723"/>
                           </a:solidFill>
-                          <a:latin typeface="Inter"/>
+                          <a:latin typeface="Arial"/>
                         </a:rPr>
                         <a:t>148.3</a:t>
                       </a:r>
@@ -8813,7 +9402,7 @@
                         <a:solidFill>
                           <a:srgbClr val="1F2723"/>
                         </a:solidFill>
-                        <a:latin typeface="Inter"/>
+                        <a:latin typeface="Arial"/>
                       </a:endParaRPr>
                     </a:p>
                   </a:txBody>
@@ -8881,7 +9470,7 @@
                 <a:solidFill>
                   <a:srgbClr val="58615B"/>
                 </a:solidFill>
-                <a:latin typeface="Inter"/>
+                <a:latin typeface="Arial"/>
               </a:rPr>
               <a:t>Spending shares are rounded so that they add to $100. Source: Brannoch National Parks Service records, April 2025 to March 2026. Illustrative figures for a fictional service.</a:t>
             </a:r>
@@ -8965,7 +9554,7 @@
                 <a:solidFill>
                   <a:srgbClr val="58615B"/>
                 </a:solidFill>
-                <a:latin typeface="Inter"/>
+                <a:latin typeface="Arial"/>
               </a:rPr>
               <a:t>Brannoch National Parks Service  |  Annual Report 2025-26</a:t>
             </a:r>
@@ -9000,7 +9589,7 @@
                 <a:solidFill>
                   <a:srgbClr val="58615B"/>
                 </a:solidFill>
-                <a:latin typeface="Inter"/>
+                <a:latin typeface="Arial"/>
               </a:rPr>
               <a:t>1</a:t>
             </a:fld>
@@ -9075,7 +9664,7 @@
                 <a:solidFill>
                   <a:srgbClr val="FFFFFF"/>
                 </a:solidFill>
-                <a:latin typeface="Gelasio"/>
+                <a:latin typeface="Georgia"/>
               </a:rPr>
               <a:t>4</a:t>
             </a:r>
@@ -9121,7 +9710,7 @@
                 <a:solidFill>
                   <a:srgbClr val="1F5A6E"/>
                 </a:solidFill>
-                <a:latin typeface="Inter"/>
+                <a:latin typeface="Arial"/>
               </a:rPr>
               <a:t>VOLUNTEER PROGRAMME</a:t>
             </a:r>
@@ -9167,7 +9756,7 @@
                 <a:solidFill>
                   <a:srgbClr val="1F2723"/>
                 </a:solidFill>
-                <a:latin typeface="Gelasio"/>
+                <a:latin typeface="Georgia"/>
               </a:rPr>
               <a:t>Volunteers gave 192,000 hours this year, up 63% in four years</a:t>
             </a:r>
@@ -9213,7 +9802,7 @@
                 <a:solidFill>
                   <a:srgbClr val="58615B"/>
                 </a:solidFill>
-                <a:latin typeface="Inter"/>
+                <a:latin typeface="Arial"/>
               </a:rPr>
               <a:t>Volunteer hours each year, with the number of volunteers under each year</a:t>
             </a:r>
@@ -9277,7 +9866,7 @@
                 <a:solidFill>
                   <a:srgbClr val="1F2723"/>
                 </a:solidFill>
-                <a:latin typeface="Gelasio"/>
+                <a:latin typeface="Georgia"/>
               </a:rPr>
               <a:t>What the work is worth</a:t>
             </a:r>
@@ -9323,7 +9912,7 @@
                 <a:solidFill>
                   <a:srgbClr val="1F2723"/>
                 </a:solidFill>
-                <a:latin typeface="Inter"/>
+                <a:latin typeface="Arial"/>
               </a:rPr>
               <a:t>At $24.50 an hour, this year's hours are worth</a:t>
             </a:r>
@@ -9333,9 +9922,9 @@
                 <a:solidFill>
                   <a:srgbClr val="1F2723"/>
                 </a:solidFill>
-                <a:latin typeface="Inter"/>
+                <a:latin typeface="Arial"/>
               </a:rPr>
-              <a:t>$4.70m: $1.18 of work for every $1 the</a:t>
+              <a:t>$4.70m: $1.18 of work for every $1 the programme</a:t>
             </a:r>
             <a:br/>
             <a:r>
@@ -9343,9 +9932,9 @@
                 <a:solidFill>
                   <a:srgbClr val="1F2723"/>
                 </a:solidFill>
-                <a:latin typeface="Inter"/>
+                <a:latin typeface="Arial"/>
               </a:rPr>
-              <a:t>programme cost us ($4.0m).</a:t>
+              <a:t>cost us ($4.0m).</a:t>
             </a:r>
           </a:p>
           <a:p>
@@ -9366,9 +9955,9 @@
                 <a:solidFill>
                   <a:srgbClr val="1F2723"/>
                 </a:solidFill>
-                <a:latin typeface="Inter"/>
+                <a:latin typeface="Arial"/>
               </a:rPr>
-              <a:t>That is the work of 116 full-time staff, given by</a:t>
+              <a:t>That is the work of 116 full-time staff, given by 4,760</a:t>
             </a:r>
             <a:br/>
             <a:r>
@@ -9376,9 +9965,9 @@
                 <a:solidFill>
                   <a:srgbClr val="1F2723"/>
                 </a:solidFill>
-                <a:latin typeface="Inter"/>
+                <a:latin typeface="Arial"/>
               </a:rPr>
-              <a:t>4,760 people.</a:t>
+              <a:t>people.</a:t>
             </a:r>
           </a:p>
         </p:txBody>
@@ -9422,9 +10011,9 @@
                 <a:solidFill>
                   <a:srgbClr val="58615B"/>
                 </a:solidFill>
-                <a:latin typeface="Inter"/>
+                <a:latin typeface="Arial"/>
               </a:rPr>
-              <a:t>$24.50 is the average hourly cost of a seasonal ranger; a full-time</a:t>
+              <a:t>$24.50 is the average hourly cost of a seasonal ranger; a full-time year is</a:t>
             </a:r>
             <a:br/>
             <a:r>
@@ -9432,9 +10021,9 @@
                 <a:solidFill>
                   <a:srgbClr val="58615B"/>
                 </a:solidFill>
-                <a:latin typeface="Inter"/>
+                <a:latin typeface="Arial"/>
               </a:rPr>
-              <a:t>year is 1,650 hours.</a:t>
+              <a:t>1,650 hours.</a:t>
             </a:r>
           </a:p>
         </p:txBody>
@@ -9478,7 +10067,7 @@
                 <a:solidFill>
                   <a:srgbClr val="1F2723"/>
                 </a:solidFill>
-                <a:latin typeface="Inter"/>
+                <a:latin typeface="Arial"/>
               </a:rPr>
               <a:t>What volunteers did in 2025-26</a:t>
             </a:r>
@@ -9524,7 +10113,7 @@
                 <a:solidFill>
                   <a:srgbClr val="1F2723"/>
                 </a:solidFill>
-                <a:latin typeface="Gelasio"/>
+                <a:latin typeface="Georgia"/>
               </a:rPr>
               <a:t>74,000</a:t>
             </a:r>
@@ -9547,7 +10136,7 @@
                 <a:solidFill>
                   <a:srgbClr val="58615B"/>
                 </a:solidFill>
-                <a:latin typeface="Inter"/>
+                <a:latin typeface="Arial"/>
               </a:rPr>
               <a:t>hours of habitat work</a:t>
             </a:r>
@@ -9593,7 +10182,7 @@
                 <a:solidFill>
                   <a:srgbClr val="1F2723"/>
                 </a:solidFill>
-                <a:latin typeface="Gelasio"/>
+                <a:latin typeface="Georgia"/>
               </a:rPr>
               <a:t>48,000</a:t>
             </a:r>
@@ -9616,7 +10205,7 @@
                 <a:solidFill>
                   <a:srgbClr val="58615B"/>
                 </a:solidFill>
-                <a:latin typeface="Inter"/>
+                <a:latin typeface="Arial"/>
               </a:rPr>
               <a:t>hours repairing trails</a:t>
             </a:r>
@@ -9662,7 +10251,7 @@
                 <a:solidFill>
                   <a:srgbClr val="1F2723"/>
                 </a:solidFill>
-                <a:latin typeface="Gelasio"/>
+                <a:latin typeface="Georgia"/>
               </a:rPr>
               <a:t>39,000</a:t>
             </a:r>
@@ -9685,7 +10274,7 @@
                 <a:solidFill>
                   <a:srgbClr val="58615B"/>
                 </a:solidFill>
-                <a:latin typeface="Inter"/>
+                <a:latin typeface="Arial"/>
               </a:rPr>
               <a:t>hours welcoming and guiding</a:t>
             </a:r>
@@ -9695,7 +10284,7 @@
                 <a:solidFill>
                   <a:srgbClr val="58615B"/>
                 </a:solidFill>
-                <a:latin typeface="Inter"/>
+                <a:latin typeface="Arial"/>
               </a:rPr>
               <a:t>visitors</a:t>
             </a:r>
@@ -9741,7 +10330,7 @@
                 <a:solidFill>
                   <a:srgbClr val="1F2723"/>
                 </a:solidFill>
-                <a:latin typeface="Gelasio"/>
+                <a:latin typeface="Georgia"/>
               </a:rPr>
               <a:t>21,000</a:t>
             </a:r>
@@ -9764,7 +10353,7 @@
                 <a:solidFill>
                   <a:srgbClr val="58615B"/>
                 </a:solidFill>
-                <a:latin typeface="Inter"/>
+                <a:latin typeface="Arial"/>
               </a:rPr>
               <a:t>hours of wildlife surveys</a:t>
             </a:r>
@@ -9810,7 +10399,7 @@
                 <a:solidFill>
                   <a:srgbClr val="1F2723"/>
                 </a:solidFill>
-                <a:latin typeface="Gelasio"/>
+                <a:latin typeface="Georgia"/>
               </a:rPr>
               <a:t>10,000</a:t>
             </a:r>
@@ -9833,7 +10422,7 @@
                 <a:solidFill>
                   <a:srgbClr val="58615B"/>
                 </a:solidFill>
-                <a:latin typeface="Inter"/>
+                <a:latin typeface="Arial"/>
               </a:rPr>
               <a:t>hours of litter clean-ups</a:t>
             </a:r>
@@ -9879,7 +10468,7 @@
                 <a:solidFill>
                   <a:srgbClr val="58615B"/>
                 </a:solidFill>
-                <a:latin typeface="Inter"/>
+                <a:latin typeface="Arial"/>
               </a:rPr>
               <a:t>Hours are logged by volunteers and checked by their team leaders. Source: Brannoch National Parks Service records, April 2025 to March 2026. Illustrative figures for a fictional service.</a:t>
             </a:r>
@@ -9894,8 +10483,8 @@
         </p:nvSpPr>
         <p:spPr>
           <a:xfrm>
-            <a:off x="1879081" y="4323029"/>
-            <a:ext cx="429058" cy="160020"/>
+            <a:off x="1906526" y="4323029"/>
+            <a:ext cx="374169" cy="160020"/>
           </a:xfrm>
           <a:prstGeom prst="rect">
             <a:avLst/>
@@ -9925,7 +10514,7 @@
                 <a:solidFill>
                   <a:srgbClr val="1F5A6E"/>
                 </a:solidFill>
-                <a:latin typeface="Inter"/>
+                <a:latin typeface="Arial"/>
               </a:rPr>
               <a:t>2,950</a:t>
             </a:r>
@@ -9940,8 +10529,8 @@
         </p:nvSpPr>
         <p:spPr>
           <a:xfrm>
-            <a:off x="3123465" y="4323029"/>
-            <a:ext cx="400799" cy="160020"/>
+            <a:off x="3136780" y="4323029"/>
+            <a:ext cx="374169" cy="160020"/>
           </a:xfrm>
           <a:prstGeom prst="rect">
             <a:avLst/>
@@ -9971,7 +10560,7 @@
                 <a:solidFill>
                   <a:srgbClr val="1F5A6E"/>
                 </a:solidFill>
-                <a:latin typeface="Inter"/>
+                <a:latin typeface="Arial"/>
               </a:rPr>
               <a:t>3,410</a:t>
             </a:r>
@@ -9986,8 +10575,8 @@
         </p:nvSpPr>
         <p:spPr>
           <a:xfrm>
-            <a:off x="4340110" y="4323029"/>
-            <a:ext cx="428016" cy="160020"/>
+            <a:off x="4367034" y="4323029"/>
+            <a:ext cx="374169" cy="160020"/>
           </a:xfrm>
           <a:prstGeom prst="rect">
             <a:avLst/>
@@ -10017,7 +10606,7 @@
                 <a:solidFill>
                   <a:srgbClr val="1F5A6E"/>
                 </a:solidFill>
-                <a:latin typeface="Inter"/>
+                <a:latin typeface="Arial"/>
               </a:rPr>
               <a:t>3,880</a:t>
             </a:r>
@@ -10032,8 +10621,8 @@
         </p:nvSpPr>
         <p:spPr>
           <a:xfrm>
-            <a:off x="5570559" y="4323029"/>
-            <a:ext cx="427626" cy="160020"/>
+            <a:off x="5597288" y="4323029"/>
+            <a:ext cx="374169" cy="160020"/>
           </a:xfrm>
           <a:prstGeom prst="rect">
             <a:avLst/>
@@ -10063,7 +10652,7 @@
                 <a:solidFill>
                   <a:srgbClr val="1F5A6E"/>
                 </a:solidFill>
-                <a:latin typeface="Inter"/>
+                <a:latin typeface="Arial"/>
               </a:rPr>
               <a:t>4,320</a:t>
             </a:r>
@@ -10078,8 +10667,8 @@
         </p:nvSpPr>
         <p:spPr>
           <a:xfrm>
-            <a:off x="6804981" y="4323029"/>
-            <a:ext cx="419291" cy="160020"/>
+            <a:off x="6827542" y="4323029"/>
+            <a:ext cx="374169" cy="160020"/>
           </a:xfrm>
           <a:prstGeom prst="rect">
             <a:avLst/>
@@ -10109,7 +10698,7 @@
                 <a:solidFill>
                   <a:srgbClr val="1F5A6E"/>
                 </a:solidFill>
-                <a:latin typeface="Inter"/>
+                <a:latin typeface="Arial"/>
               </a:rPr>
               <a:t>4,760</a:t>
             </a:r>
@@ -10124,8 +10713,8 @@
         </p:nvSpPr>
         <p:spPr>
           <a:xfrm>
-            <a:off x="796566" y="4326839"/>
-            <a:ext cx="681917" cy="152400"/>
+            <a:off x="837866" y="4326839"/>
+            <a:ext cx="640617" cy="152400"/>
           </a:xfrm>
           <a:prstGeom prst="rect">
             <a:avLst/>
@@ -10155,7 +10744,7 @@
                 <a:solidFill>
                   <a:srgbClr val="58615B"/>
                 </a:solidFill>
-                <a:latin typeface="Inter"/>
+                <a:latin typeface="Arial"/>
               </a:rPr>
               <a:t>Volunteers</a:t>
             </a:r>
@@ -10239,7 +10828,7 @@
                 <a:solidFill>
                   <a:srgbClr val="58615B"/>
                 </a:solidFill>
-                <a:latin typeface="Inter"/>
+                <a:latin typeface="Arial"/>
               </a:rPr>
               <a:t>Brannoch National Parks Service  |  Annual Report 2025-26</a:t>
             </a:r>
@@ -10274,7 +10863,7 @@
                 <a:solidFill>
                   <a:srgbClr val="58615B"/>
                 </a:solidFill>
-                <a:latin typeface="Inter"/>
+                <a:latin typeface="Arial"/>
               </a:rPr>
               <a:t>1</a:t>
             </a:fld>
@@ -10349,7 +10938,7 @@
                 <a:solidFill>
                   <a:srgbClr val="FFFFFF"/>
                 </a:solidFill>
-                <a:latin typeface="Gelasio"/>
+                <a:latin typeface="Georgia"/>
               </a:rPr>
               <a:t>5</a:t>
             </a:r>
@@ -10395,7 +10984,7 @@
                 <a:solidFill>
                   <a:srgbClr val="1F5A6E"/>
                 </a:solidFill>
-                <a:latin typeface="Inter"/>
+                <a:latin typeface="Arial"/>
               </a:rPr>
               <a:t>PRIORITIES FOR NEXT YEAR</a:t>
             </a:r>
@@ -10441,7 +11030,7 @@
                 <a:solidFill>
                   <a:srgbClr val="1F2723"/>
                 </a:solidFill>
-                <a:latin typeface="Gelasio"/>
+                <a:latin typeface="Georgia"/>
               </a:rPr>
               <a:t>Five commitments for 2026-27, costing $13.6m, each with a</a:t>
             </a:r>
@@ -10451,7 +11040,7 @@
                 <a:solidFill>
                   <a:srgbClr val="1F2723"/>
                 </a:solidFill>
-                <a:latin typeface="Gelasio"/>
+                <a:latin typeface="Georgia"/>
               </a:rPr>
               <a:t>measure we will report next year</a:t>
             </a:r>
@@ -10497,7 +11086,7 @@
                 <a:solidFill>
                   <a:srgbClr val="1F2723"/>
                 </a:solidFill>
-                <a:latin typeface="Inter"/>
+                <a:latin typeface="Arial"/>
               </a:rPr>
               <a:t>Each commitment answers a finding on the pages before. Hold us to the measures: next year's report will say whether we met each one.</a:t>
             </a:r>
@@ -10538,7 +11127,7 @@
                           <a:solidFill>
                             <a:srgbClr val="1F2723"/>
                           </a:solidFill>
-                          <a:latin typeface="Inter"/>
+                          <a:latin typeface="Arial"/>
                         </a:rPr>
                         <a:t>Commitment</a:t>
                       </a:r>
@@ -10546,7 +11135,7 @@
                         <a:solidFill>
                           <a:srgbClr val="1F2723"/>
                         </a:solidFill>
-                        <a:latin typeface="Inter"/>
+                        <a:latin typeface="Arial"/>
                       </a:endParaRPr>
                     </a:p>
                   </a:txBody>
@@ -10579,7 +11168,7 @@
                           <a:solidFill>
                             <a:srgbClr val="1F2723"/>
                           </a:solidFill>
-                          <a:latin typeface="Inter"/>
+                          <a:latin typeface="Arial"/>
                         </a:rPr>
                         <a:t>What we will do</a:t>
                       </a:r>
@@ -10587,7 +11176,7 @@
                         <a:solidFill>
                           <a:srgbClr val="1F2723"/>
                         </a:solidFill>
-                        <a:latin typeface="Inter"/>
+                        <a:latin typeface="Arial"/>
                       </a:endParaRPr>
                     </a:p>
                   </a:txBody>
@@ -10620,7 +11209,7 @@
                           <a:solidFill>
                             <a:srgbClr val="1F2723"/>
                           </a:solidFill>
-                          <a:latin typeface="Inter"/>
+                          <a:latin typeface="Arial"/>
                         </a:rPr>
                         <a:t>How you will know, by March 2027</a:t>
                       </a:r>
@@ -10628,7 +11217,7 @@
                         <a:solidFill>
                           <a:srgbClr val="1F2723"/>
                         </a:solidFill>
-                        <a:latin typeface="Inter"/>
+                        <a:latin typeface="Arial"/>
                       </a:endParaRPr>
                     </a:p>
                   </a:txBody>
@@ -10661,7 +11250,7 @@
                           <a:solidFill>
                             <a:srgbClr val="1F2723"/>
                           </a:solidFill>
-                          <a:latin typeface="Inter"/>
+                          <a:latin typeface="Arial"/>
                         </a:rPr>
                         <a:t>Budget ($m)</a:t>
                       </a:r>
@@ -10669,7 +11258,7 @@
                         <a:solidFill>
                           <a:srgbClr val="1F2723"/>
                         </a:solidFill>
-                        <a:latin typeface="Inter"/>
+                        <a:latin typeface="Arial"/>
                       </a:endParaRPr>
                     </a:p>
                   </a:txBody>
@@ -10704,7 +11293,7 @@
                           <a:solidFill>
                             <a:srgbClr val="1F2723"/>
                           </a:solidFill>
-                          <a:latin typeface="Inter"/>
+                          <a:latin typeface="Arial"/>
                         </a:rPr>
                         <a:t>1  Healthier rivers</a:t>
                       </a:r>
@@ -10712,7 +11301,7 @@
                         <a:solidFill>
                           <a:srgbClr val="1F2723"/>
                         </a:solidFill>
-                        <a:latin typeface="Inter"/>
+                        <a:latin typeface="Arial"/>
                       </a:endParaRPr>
                     </a:p>
                   </a:txBody>
@@ -10747,7 +11336,7 @@
                           <a:solidFill>
                             <a:srgbClr val="1F2723"/>
                           </a:solidFill>
-                          <a:latin typeface="Inter"/>
+                          <a:latin typeface="Arial"/>
                         </a:rPr>
                         <a:t>Replant 18 km of riverbank with native trees and fence it from grazing, to cool and clean the water for salmon and mussels</a:t>
                       </a:r>
@@ -10755,7 +11344,7 @@
                         <a:solidFill>
                           <a:srgbClr val="1F2723"/>
                         </a:solidFill>
-                        <a:latin typeface="Inter"/>
+                        <a:latin typeface="Arial"/>
                       </a:endParaRPr>
                     </a:p>
                   </a:txBody>
@@ -10790,7 +11379,7 @@
                           <a:solidFill>
                             <a:srgbClr val="1F2723"/>
                           </a:solidFill>
-                          <a:latin typeface="Inter"/>
+                          <a:latin typeface="Arial"/>
                         </a:rPr>
                         <a:t>18 km planted; silt and summer water temperature measured at 12 river sites</a:t>
                       </a:r>
@@ -10798,7 +11387,7 @@
                         <a:solidFill>
                           <a:srgbClr val="1F2723"/>
                         </a:solidFill>
-                        <a:latin typeface="Inter"/>
+                        <a:latin typeface="Arial"/>
                       </a:endParaRPr>
                     </a:p>
                   </a:txBody>
@@ -10833,7 +11422,7 @@
                           <a:solidFill>
                             <a:srgbClr val="1F2723"/>
                           </a:solidFill>
-                          <a:latin typeface="Inter"/>
+                          <a:latin typeface="Arial"/>
                         </a:rPr>
                         <a:t>3.4</a:t>
                       </a:r>
@@ -10841,7 +11430,7 @@
                         <a:solidFill>
                           <a:srgbClr val="1F2723"/>
                         </a:solidFill>
-                        <a:latin typeface="Inter"/>
+                        <a:latin typeface="Arial"/>
                       </a:endParaRPr>
                     </a:p>
                   </a:txBody>
@@ -10878,7 +11467,7 @@
                           <a:solidFill>
                             <a:srgbClr val="1F2723"/>
                           </a:solidFill>
-                          <a:latin typeface="Inter"/>
+                          <a:latin typeface="Arial"/>
                         </a:rPr>
                         <a:t>2  Getting here without a car</a:t>
                       </a:r>
@@ -10886,7 +11475,7 @@
                         <a:solidFill>
                           <a:srgbClr val="1F2723"/>
                         </a:solidFill>
-                        <a:latin typeface="Inter"/>
+                        <a:latin typeface="Arial"/>
                       </a:endParaRPr>
                     </a:p>
                   </a:txBody>
@@ -10921,7 +11510,7 @@
                           <a:solidFill>
                             <a:srgbClr val="1F2723"/>
                           </a:solidFill>
-                          <a:latin typeface="Inter"/>
+                          <a:latin typeface="Arial"/>
                         </a:rPr>
                         <a:t>Run three new shuttle routes from rail stations and towns, with one ticket for the bus and entry</a:t>
                       </a:r>
@@ -10929,7 +11518,7 @@
                         <a:solidFill>
                           <a:srgbClr val="1F2723"/>
                         </a:solidFill>
-                        <a:latin typeface="Inter"/>
+                        <a:latin typeface="Arial"/>
                       </a:endParaRPr>
                     </a:p>
                   </a:txBody>
@@ -10964,7 +11553,7 @@
                           <a:solidFill>
                             <a:srgbClr val="1F2723"/>
                           </a:solidFill>
-                          <a:latin typeface="Inter"/>
+                          <a:latin typeface="Arial"/>
                         </a:rPr>
                         <a:t>30% of visits by bus, shuttle or train, up from 25%</a:t>
                       </a:r>
@@ -10972,7 +11561,7 @@
                         <a:solidFill>
                           <a:srgbClr val="1F2723"/>
                         </a:solidFill>
-                        <a:latin typeface="Inter"/>
+                        <a:latin typeface="Arial"/>
                       </a:endParaRPr>
                     </a:p>
                   </a:txBody>
@@ -11007,7 +11596,7 @@
                           <a:solidFill>
                             <a:srgbClr val="1F2723"/>
                           </a:solidFill>
-                          <a:latin typeface="Inter"/>
+                          <a:latin typeface="Arial"/>
                         </a:rPr>
                         <a:t>2.6</a:t>
                       </a:r>
@@ -11015,7 +11604,7 @@
                         <a:solidFill>
                           <a:srgbClr val="1F2723"/>
                         </a:solidFill>
-                        <a:latin typeface="Inter"/>
+                        <a:latin typeface="Arial"/>
                       </a:endParaRPr>
                     </a:p>
                   </a:txBody>
@@ -11052,7 +11641,7 @@
                           <a:solidFill>
                             <a:srgbClr val="1F2723"/>
                           </a:solidFill>
-                          <a:latin typeface="Inter"/>
+                          <a:latin typeface="Arial"/>
                         </a:rPr>
                         <a:t>3  Step-free trails</a:t>
                       </a:r>
@@ -11060,7 +11649,7 @@
                         <a:solidFill>
                           <a:srgbClr val="1F2723"/>
                         </a:solidFill>
-                        <a:latin typeface="Inter"/>
+                        <a:latin typeface="Arial"/>
                       </a:endParaRPr>
                     </a:p>
                   </a:txBody>
@@ -11095,7 +11684,7 @@
                           <a:solidFill>
                             <a:srgbClr val="1F2723"/>
                           </a:solidFill>
-                          <a:latin typeface="Inter"/>
+                          <a:latin typeface="Arial"/>
                         </a:rPr>
                         <a:t>Resurface and widen trails so wheelchairs, buggies and walking frames can use them</a:t>
                       </a:r>
@@ -11103,7 +11692,7 @@
                         <a:solidFill>
                           <a:srgbClr val="1F2723"/>
                         </a:solidFill>
-                        <a:latin typeface="Inter"/>
+                        <a:latin typeface="Arial"/>
                       </a:endParaRPr>
                     </a:p>
                   </a:txBody>
@@ -11138,7 +11727,7 @@
                           <a:solidFill>
                             <a:srgbClr val="1F2723"/>
                           </a:solidFill>
-                          <a:latin typeface="Inter"/>
+                          <a:latin typeface="Arial"/>
                         </a:rPr>
                         <a:t>281 km of step-free trail, up from 241 km</a:t>
                       </a:r>
@@ -11146,7 +11735,7 @@
                         <a:solidFill>
                           <a:srgbClr val="1F2723"/>
                         </a:solidFill>
-                        <a:latin typeface="Inter"/>
+                        <a:latin typeface="Arial"/>
                       </a:endParaRPr>
                     </a:p>
                   </a:txBody>
@@ -11181,7 +11770,7 @@
                           <a:solidFill>
                             <a:srgbClr val="1F2723"/>
                           </a:solidFill>
-                          <a:latin typeface="Inter"/>
+                          <a:latin typeface="Arial"/>
                         </a:rPr>
                         <a:t>1.9</a:t>
                       </a:r>
@@ -11189,7 +11778,7 @@
                         <a:solidFill>
                           <a:srgbClr val="1F2723"/>
                         </a:solidFill>
-                        <a:latin typeface="Inter"/>
+                        <a:latin typeface="Arial"/>
                       </a:endParaRPr>
                     </a:p>
                   </a:txBody>
@@ -11226,7 +11815,7 @@
                           <a:solidFill>
                             <a:srgbClr val="1F2723"/>
                           </a:solidFill>
-                          <a:latin typeface="Inter"/>
+                          <a:latin typeface="Arial"/>
                         </a:rPr>
                         <a:t>4  Repairs we have put off</a:t>
                       </a:r>
@@ -11234,7 +11823,7 @@
                         <a:solidFill>
                           <a:srgbClr val="1F2723"/>
                         </a:solidFill>
-                        <a:latin typeface="Inter"/>
+                        <a:latin typeface="Arial"/>
                       </a:endParaRPr>
                     </a:p>
                   </a:txBody>
@@ -11269,7 +11858,7 @@
                           <a:solidFill>
                             <a:srgbClr val="1F2723"/>
                           </a:solidFill>
-                          <a:latin typeface="Inter"/>
+                          <a:latin typeface="Arial"/>
                         </a:rPr>
                         <a:t>Fix bridges, toilets and paths on our list of 214 priority repairs, worst first</a:t>
                       </a:r>
@@ -11277,7 +11866,7 @@
                         <a:solidFill>
                           <a:srgbClr val="1F2723"/>
                         </a:solidFill>
-                        <a:latin typeface="Inter"/>
+                        <a:latin typeface="Arial"/>
                       </a:endParaRPr>
                     </a:p>
                   </a:txBody>
@@ -11312,7 +11901,7 @@
                           <a:solidFill>
                             <a:srgbClr val="1F2723"/>
                           </a:solidFill>
-                          <a:latin typeface="Inter"/>
+                          <a:latin typeface="Arial"/>
                         </a:rPr>
                         <a:t>60 of the 214 repairs done (28%)</a:t>
                       </a:r>
@@ -11320,7 +11909,7 @@
                         <a:solidFill>
                           <a:srgbClr val="1F2723"/>
                         </a:solidFill>
-                        <a:latin typeface="Inter"/>
+                        <a:latin typeface="Arial"/>
                       </a:endParaRPr>
                     </a:p>
                   </a:txBody>
@@ -11355,7 +11944,7 @@
                           <a:solidFill>
                             <a:srgbClr val="1F2723"/>
                           </a:solidFill>
-                          <a:latin typeface="Inter"/>
+                          <a:latin typeface="Arial"/>
                         </a:rPr>
                         <a:t>4.8</a:t>
                       </a:r>
@@ -11363,7 +11952,7 @@
                         <a:solidFill>
                           <a:srgbClr val="1F2723"/>
                         </a:solidFill>
-                        <a:latin typeface="Inter"/>
+                        <a:latin typeface="Arial"/>
                       </a:endParaRPr>
                     </a:p>
                   </a:txBody>
@@ -11400,7 +11989,7 @@
                           <a:solidFill>
                             <a:srgbClr val="1F2723"/>
                           </a:solidFill>
-                          <a:latin typeface="Inter"/>
+                          <a:latin typeface="Arial"/>
                         </a:rPr>
                         <a:t>5  More and younger volunteers</a:t>
                       </a:r>
@@ -11408,7 +11997,7 @@
                         <a:solidFill>
                           <a:srgbClr val="1F2723"/>
                         </a:solidFill>
-                        <a:latin typeface="Inter"/>
+                        <a:latin typeface="Arial"/>
                       </a:endParaRPr>
                     </a:p>
                   </a:txBody>
@@ -11443,7 +12032,7 @@
                           <a:solidFill>
                             <a:srgbClr val="1F2723"/>
                           </a:solidFill>
-                          <a:latin typeface="Inter"/>
+                          <a:latin typeface="Arial"/>
                         </a:rPr>
                         <a:t>Start a scheme for 16 to 25 year olds and add weekend and evening sessions</a:t>
                       </a:r>
@@ -11451,7 +12040,7 @@
                         <a:solidFill>
                           <a:srgbClr val="1F2723"/>
                         </a:solidFill>
-                        <a:latin typeface="Inter"/>
+                        <a:latin typeface="Arial"/>
                       </a:endParaRPr>
                     </a:p>
                   </a:txBody>
@@ -11486,7 +12075,7 @@
                           <a:solidFill>
                             <a:srgbClr val="1F2723"/>
                           </a:solidFill>
-                          <a:latin typeface="Inter"/>
+                          <a:latin typeface="Arial"/>
                         </a:rPr>
                         <a:t>5,300 volunteers, up from 4,760</a:t>
                       </a:r>
@@ -11494,7 +12083,7 @@
                         <a:solidFill>
                           <a:srgbClr val="1F2723"/>
                         </a:solidFill>
-                        <a:latin typeface="Inter"/>
+                        <a:latin typeface="Arial"/>
                       </a:endParaRPr>
                     </a:p>
                   </a:txBody>
@@ -11529,7 +12118,7 @@
                           <a:solidFill>
                             <a:srgbClr val="1F2723"/>
                           </a:solidFill>
-                          <a:latin typeface="Inter"/>
+                          <a:latin typeface="Arial"/>
                         </a:rPr>
                         <a:t>0.9</a:t>
                       </a:r>
@@ -11537,7 +12126,7 @@
                         <a:solidFill>
                           <a:srgbClr val="1F2723"/>
                         </a:solidFill>
-                        <a:latin typeface="Inter"/>
+                        <a:latin typeface="Arial"/>
                       </a:endParaRPr>
                     </a:p>
                   </a:txBody>
@@ -11574,7 +12163,7 @@
                           <a:solidFill>
                             <a:srgbClr val="1F2723"/>
                           </a:solidFill>
-                          <a:latin typeface="Inter"/>
+                          <a:latin typeface="Arial"/>
                         </a:rPr>
                         <a:t>Total</a:t>
                       </a:r>
@@ -11582,7 +12171,7 @@
                         <a:solidFill>
                           <a:srgbClr val="1F2723"/>
                         </a:solidFill>
-                        <a:latin typeface="Inter"/>
+                        <a:latin typeface="Arial"/>
                       </a:endParaRPr>
                     </a:p>
                   </a:txBody>
@@ -11616,7 +12205,7 @@
                         <a:solidFill>
                           <a:srgbClr val="1F2723"/>
                         </a:solidFill>
-                        <a:latin typeface="Inter"/>
+                        <a:latin typeface="Arial"/>
                       </a:endParaRPr>
                     </a:p>
                   </a:txBody>
@@ -11650,7 +12239,7 @@
                         <a:solidFill>
                           <a:srgbClr val="1F2723"/>
                         </a:solidFill>
-                        <a:latin typeface="Inter"/>
+                        <a:latin typeface="Arial"/>
                       </a:endParaRPr>
                     </a:p>
                   </a:txBody>
@@ -11685,7 +12274,7 @@
                           <a:solidFill>
                             <a:srgbClr val="1F2723"/>
                           </a:solidFill>
-                          <a:latin typeface="Inter"/>
+                          <a:latin typeface="Arial"/>
                         </a:rPr>
                         <a:t>13.6</a:t>
                       </a:r>
@@ -11693,7 +12282,7 @@
                         <a:solidFill>
                           <a:srgbClr val="1F2723"/>
                         </a:solidFill>
-                        <a:latin typeface="Inter"/>
+                        <a:latin typeface="Arial"/>
                       </a:endParaRPr>
                     </a:p>
                   </a:txBody>
@@ -11761,7 +12350,7 @@
                 <a:solidFill>
                   <a:srgbClr val="58615B"/>
                 </a:solidFill>
-                <a:latin typeface="Inter"/>
+                <a:latin typeface="Arial"/>
               </a:rPr>
               <a:t>Budgets are from the 2026-27 spending plan approved by the Service's board. Source: Brannoch National Parks Service records, April 2025 to March 2026. Illustrative figures for a fictional service.</a:t>
             </a:r>

--- a/docs/showcase/parks-annual-report.pptx
+++ b/docs/showcase/parks-annual-report.pptx
@@ -4892,7 +4892,7 @@
           <a:spcPct val="20000"/>
         </a:spcBef>
         <a:buFont typeface="Arial"/>
-        <a:buChar char="–"/>
+        <a:buChar char="•"/>
         <a:defRPr sz="2800" kern="1200">
           <a:solidFill>
             <a:schemeClr val="tx1"/>
@@ -4922,7 +4922,7 @@
           <a:spcPct val="20000"/>
         </a:spcBef>
         <a:buFont typeface="Arial"/>
-        <a:buChar char="–"/>
+        <a:buChar char="•"/>
         <a:defRPr sz="2000" kern="1200">
           <a:solidFill>
             <a:schemeClr val="tx1"/>

--- a/docs/showcase/parks-annual-report.pptx
+++ b/docs/showcase/parks-annual-report.pptx
@@ -9508,7 +9508,7 @@
       <p:grpSpPr/>
       <p:cxnSp>
         <p:nvCxnSpPr>
-          <p:cNvPr id="24" name="chrome-1"/>
+          <p:cNvPr id="26" name="chrome-1"/>
           <p:cNvCxnSpPr/>
           <p:nvPr/>
         </p:nvCxnSpPr>
@@ -9529,7 +9529,7 @@
       </p:cxnSp>
       <p:sp>
         <p:nvSpPr>
-          <p:cNvPr id="25" name="chrome-2"/>
+          <p:cNvPr id="27" name="chrome-2"/>
           <p:cNvSpPr txBox="1"/>
           <p:nvPr/>
         </p:nvSpPr>
@@ -9563,7 +9563,7 @@
       </p:sp>
       <p:sp>
         <p:nvSpPr>
-          <p:cNvPr id="26" name="chrome-3"/>
+          <p:cNvPr id="28" name="chrome-3"/>
           <p:cNvSpPr txBox="1"/>
           <p:nvPr/>
         </p:nvSpPr>
@@ -10030,7 +10030,119 @@
       </p:sp>
       <p:sp>
         <p:nvSpPr>
-          <p:cNvPr id="11" name="acts-h"/>
+          <p:cNvPr id="11" name="per-h"/>
+          <p:cNvSpPr/>
+          <p:nvPr/>
+        </p:nvSpPr>
+        <p:spPr>
+          <a:xfrm>
+            <a:off x="8067040" y="3188970"/>
+            <a:ext cx="3576320" cy="209550"/>
+          </a:xfrm>
+          <a:prstGeom prst="rect">
+            <a:avLst/>
+          </a:prstGeom>
+          <a:noFill/>
+        </p:spPr>
+        <p:txBody>
+          <a:bodyPr wrap="square" lIns="0" tIns="0" rIns="0" bIns="0" anchor="t">
+            <a:noAutofit/>
+          </a:bodyPr>
+          <a:lstStyle/>
+          <a:p>
+            <a:pPr algn="l" marL="0" indent="0">
+              <a:lnSpc>
+                <a:spcPts val="1650"/>
+              </a:lnSpc>
+              <a:spcBef>
+                <a:spcPts val="0"/>
+              </a:spcBef>
+              <a:spcAft>
+                <a:spcPts val="0"/>
+              </a:spcAft>
+              <a:buNone/>
+            </a:pPr>
+            <a:r>
+              <a:rPr sz="1500" b="1" i="0">
+                <a:solidFill>
+                  <a:srgbClr val="1F2723"/>
+                </a:solidFill>
+                <a:latin typeface="Georgia"/>
+              </a:rPr>
+              <a:t>More people, not longer hours</a:t>
+            </a:r>
+          </a:p>
+        </p:txBody>
+      </p:sp>
+      <p:sp>
+        <p:nvSpPr>
+          <p:cNvPr id="12" name="per"/>
+          <p:cNvSpPr/>
+          <p:nvPr/>
+        </p:nvSpPr>
+        <p:spPr>
+          <a:xfrm>
+            <a:off x="8067040" y="3489960"/>
+            <a:ext cx="3576320" cy="647700"/>
+          </a:xfrm>
+          <a:prstGeom prst="rect">
+            <a:avLst/>
+          </a:prstGeom>
+          <a:noFill/>
+        </p:spPr>
+        <p:txBody>
+          <a:bodyPr wrap="square" lIns="0" tIns="0" rIns="0" bIns="0" anchor="t">
+            <a:noAutofit/>
+          </a:bodyPr>
+          <a:lstStyle/>
+          <a:p>
+            <a:pPr algn="l" marL="0" indent="0">
+              <a:lnSpc>
+                <a:spcPts val="1500"/>
+              </a:lnSpc>
+              <a:spcBef>
+                <a:spcPts val="0"/>
+              </a:spcBef>
+              <a:spcAft>
+                <a:spcPts val="600"/>
+              </a:spcAft>
+              <a:buNone/>
+            </a:pPr>
+            <a:r>
+              <a:rPr sz="1200" b="0" i="0">
+                <a:solidFill>
+                  <a:srgbClr val="1F2723"/>
+                </a:solidFill>
+                <a:latin typeface="Arial"/>
+              </a:rPr>
+              <a:t>Each volunteer gave about 40 hours a year in all five</a:t>
+            </a:r>
+            <a:br/>
+            <a:r>
+              <a:rPr sz="1200" b="0" i="0">
+                <a:solidFill>
+                  <a:srgbClr val="1F2723"/>
+                </a:solidFill>
+                <a:latin typeface="Arial"/>
+              </a:rPr>
+              <a:t>years, between 39.6 and 40.8 hours, so the 63%</a:t>
+            </a:r>
+            <a:br/>
+            <a:r>
+              <a:rPr sz="1200" b="0" i="0">
+                <a:solidFill>
+                  <a:srgbClr val="1F2723"/>
+                </a:solidFill>
+                <a:latin typeface="Arial"/>
+              </a:rPr>
+              <a:t>rise in hours came from the 61% rise in volunteers.</a:t>
+            </a:r>
+          </a:p>
+        </p:txBody>
+      </p:sp>
+      <p:sp>
+        <p:nvSpPr>
+          <p:cNvPr id="13" name="acts-h"/>
           <p:cNvSpPr/>
           <p:nvPr/>
         </p:nvSpPr>
@@ -10076,7 +10188,7 @@
       </p:sp>
       <p:sp>
         <p:nvSpPr>
-          <p:cNvPr id="12" name="act0"/>
+          <p:cNvPr id="14" name="act0"/>
           <p:cNvSpPr/>
           <p:nvPr/>
         </p:nvSpPr>
@@ -10145,7 +10257,7 @@
       </p:sp>
       <p:sp>
         <p:nvSpPr>
-          <p:cNvPr id="13" name="act1"/>
+          <p:cNvPr id="15" name="act1"/>
           <p:cNvSpPr/>
           <p:nvPr/>
         </p:nvSpPr>
@@ -10214,7 +10326,7 @@
       </p:sp>
       <p:sp>
         <p:nvSpPr>
-          <p:cNvPr id="14" name="act2"/>
+          <p:cNvPr id="16" name="act2"/>
           <p:cNvSpPr/>
           <p:nvPr/>
         </p:nvSpPr>
@@ -10293,7 +10405,7 @@
       </p:sp>
       <p:sp>
         <p:nvSpPr>
-          <p:cNvPr id="15" name="act3"/>
+          <p:cNvPr id="17" name="act3"/>
           <p:cNvSpPr/>
           <p:nvPr/>
         </p:nvSpPr>
@@ -10362,7 +10474,7 @@
       </p:sp>
       <p:sp>
         <p:nvSpPr>
-          <p:cNvPr id="16" name="act4"/>
+          <p:cNvPr id="18" name="act4"/>
           <p:cNvSpPr/>
           <p:nvPr/>
         </p:nvSpPr>
@@ -10431,7 +10543,7 @@
       </p:sp>
       <p:sp>
         <p:nvSpPr>
-          <p:cNvPr id="17" name="source"/>
+          <p:cNvPr id="19" name="source"/>
           <p:cNvSpPr/>
           <p:nvPr/>
         </p:nvSpPr>
@@ -10477,7 +10589,7 @@
       </p:sp>
       <p:sp>
         <p:nvSpPr>
-          <p:cNvPr id="18" name="vols-0-text"/>
+          <p:cNvPr id="20" name="vols-0-text"/>
           <p:cNvSpPr/>
           <p:nvPr/>
         </p:nvSpPr>
@@ -10523,7 +10635,7 @@
       </p:sp>
       <p:sp>
         <p:nvSpPr>
-          <p:cNvPr id="19" name="vols-1-text"/>
+          <p:cNvPr id="21" name="vols-1-text"/>
           <p:cNvSpPr/>
           <p:nvPr/>
         </p:nvSpPr>
@@ -10569,7 +10681,7 @@
       </p:sp>
       <p:sp>
         <p:nvSpPr>
-          <p:cNvPr id="20" name="vols-2-text"/>
+          <p:cNvPr id="22" name="vols-2-text"/>
           <p:cNvSpPr/>
           <p:nvPr/>
         </p:nvSpPr>
@@ -10615,7 +10727,7 @@
       </p:sp>
       <p:sp>
         <p:nvSpPr>
-          <p:cNvPr id="21" name="vols-3-text"/>
+          <p:cNvPr id="23" name="vols-3-text"/>
           <p:cNvSpPr/>
           <p:nvPr/>
         </p:nvSpPr>
@@ -10661,7 +10773,7 @@
       </p:sp>
       <p:sp>
         <p:nvSpPr>
-          <p:cNvPr id="22" name="vols-4-text"/>
+          <p:cNvPr id="24" name="vols-4-text"/>
           <p:cNvSpPr/>
           <p:nvPr/>
         </p:nvSpPr>
@@ -10707,7 +10819,7 @@
       </p:sp>
       <p:sp>
         <p:nvSpPr>
-          <p:cNvPr id="23" name="vols-label"/>
+          <p:cNvPr id="25" name="vols-label"/>
           <p:cNvSpPr/>
           <p:nvPr/>
         </p:nvSpPr>
